--- a/재정학/01_Lectures/재정학_Chapter_1.pptx
+++ b/재정학/01_Lectures/재정학_Chapter_1.pptx
@@ -230,7 +230,7 @@
           <a:p>
             <a:fld id="{4A5E00EF-AEA4-43E2-9451-8F9C59A39471}" type="datetimeFigureOut">
               <a:rPr lang="ko-KR" altLang="en-US" smtClean="0"/>
-              <a:t>2025-12-23</a:t>
+              <a:t>2026-02-25</a:t>
             </a:fld>
             <a:endParaRPr lang="ko-KR" altLang="en-US"/>
           </a:p>
@@ -652,7 +652,7 @@
           <a:p>
             <a:fld id="{CD32C56F-BD27-4999-9E6D-D4EACE3DA9F4}" type="datetime1">
               <a:rPr lang="ko-KR" altLang="en-US" smtClean="0"/>
-              <a:t>2025-12-23</a:t>
+              <a:t>2026-02-25</a:t>
             </a:fld>
             <a:endParaRPr lang="ko-KR" altLang="en-US"/>
           </a:p>
@@ -866,7 +866,7 @@
           <a:p>
             <a:fld id="{8EF4A19C-72C8-45CA-8E3F-68A7FA345D6C}" type="datetime1">
               <a:rPr lang="ko-KR" altLang="en-US" smtClean="0"/>
-              <a:t>2025-12-23</a:t>
+              <a:t>2026-02-25</a:t>
             </a:fld>
             <a:endParaRPr lang="ko-KR" altLang="en-US"/>
           </a:p>
@@ -1090,7 +1090,7 @@
           <a:p>
             <a:fld id="{56A175B2-010B-4341-954C-5F8F5C70B124}" type="datetime1">
               <a:rPr lang="ko-KR" altLang="en-US" smtClean="0"/>
-              <a:t>2025-12-23</a:t>
+              <a:t>2026-02-25</a:t>
             </a:fld>
             <a:endParaRPr lang="ko-KR" altLang="en-US"/>
           </a:p>
@@ -1304,7 +1304,7 @@
           <a:p>
             <a:fld id="{16B83F9E-22C9-45CA-9E85-070F1D3EF530}" type="datetime1">
               <a:rPr lang="ko-KR" altLang="en-US" smtClean="0"/>
-              <a:t>2025-12-23</a:t>
+              <a:t>2026-02-25</a:t>
             </a:fld>
             <a:endParaRPr lang="ko-KR" altLang="en-US"/>
           </a:p>
@@ -1595,7 +1595,7 @@
           <a:p>
             <a:fld id="{03278F45-FB3C-4C4D-B89A-7BC3F5F229F6}" type="datetime1">
               <a:rPr lang="ko-KR" altLang="en-US" smtClean="0"/>
-              <a:t>2025-12-23</a:t>
+              <a:t>2026-02-25</a:t>
             </a:fld>
             <a:endParaRPr lang="ko-KR" altLang="en-US"/>
           </a:p>
@@ -1988,7 +1988,7 @@
           <a:p>
             <a:fld id="{38FDAC3C-35A6-415C-9F03-738A6AC328B1}" type="datetime1">
               <a:rPr lang="ko-KR" altLang="en-US" smtClean="0"/>
-              <a:t>2025-12-23</a:t>
+              <a:t>2026-02-25</a:t>
             </a:fld>
             <a:endParaRPr lang="ko-KR" altLang="en-US"/>
           </a:p>
@@ -3582,7 +3582,7 @@
           <a:p>
             <a:fld id="{507A0DF1-AEE6-4B0D-89D2-351E7B3EF65C}" type="datetime1">
               <a:rPr lang="ko-KR" altLang="en-US" smtClean="0"/>
-              <a:t>2025-12-23</a:t>
+              <a:t>2026-02-25</a:t>
             </a:fld>
             <a:endParaRPr lang="ko-KR" altLang="en-US"/>
           </a:p>
@@ -4010,7 +4010,7 @@
           <a:p>
             <a:fld id="{CA93B8C9-630F-4D57-944D-04FD37CECCD3}" type="datetime1">
               <a:rPr lang="ko-KR" altLang="en-US" smtClean="0"/>
-              <a:t>2025-12-23</a:t>
+              <a:t>2026-02-25</a:t>
             </a:fld>
             <a:endParaRPr lang="ko-KR" altLang="en-US"/>
           </a:p>
@@ -4167,7 +4167,7 @@
           <a:p>
             <a:fld id="{E986165A-AC43-4902-9541-874ECD310BA3}" type="datetime1">
               <a:rPr lang="ko-KR" altLang="en-US" smtClean="0"/>
-              <a:t>2025-12-23</a:t>
+              <a:t>2026-02-25</a:t>
             </a:fld>
             <a:endParaRPr lang="ko-KR" altLang="en-US"/>
           </a:p>
@@ -4494,7 +4494,7 @@
           <a:p>
             <a:fld id="{47E6EE6D-2B0E-43A9-87A2-7354CDB998F4}" type="datetime1">
               <a:rPr lang="ko-KR" altLang="en-US" smtClean="0"/>
-              <a:t>2025-12-23</a:t>
+              <a:t>2026-02-25</a:t>
             </a:fld>
             <a:endParaRPr lang="ko-KR" altLang="en-US"/>
           </a:p>
@@ -4798,7 +4798,7 @@
           <a:p>
             <a:fld id="{5CC5944E-0BC8-4FAA-9F94-6B4B05834E10}" type="datetime1">
               <a:rPr lang="ko-KR" altLang="en-US" smtClean="0"/>
-              <a:t>2025-12-23</a:t>
+              <a:t>2026-02-25</a:t>
             </a:fld>
             <a:endParaRPr lang="ko-KR" altLang="en-US"/>
           </a:p>
@@ -7656,7 +7656,15 @@
             </a:pPr>
             <a:r>
               <a:rPr lang="ko-KR" altLang="en-US" sz="1600" spc="-50" dirty="0"/>
-              <a:t>시장기구는 소득과 재산을 공평하게 분배한다는 보장이 없다는 문제점을 지적할 수 있다</a:t>
+              <a:t>시장기구는 효율적인 자원배분을 가능케 한다고 배웠지만</a:t>
+            </a:r>
+            <a:r>
+              <a:rPr lang="en-US" altLang="ko-KR" sz="1600" spc="-50" dirty="0"/>
+              <a:t>, </a:t>
+            </a:r>
+            <a:r>
+              <a:rPr lang="ko-KR" altLang="en-US" sz="1600" spc="-50" dirty="0"/>
+              <a:t>일련의 이상적인 조건이 충족되어 있을 때를 전제로 한다</a:t>
             </a:r>
             <a:r>
               <a:rPr lang="en-US" altLang="ko-KR" sz="1600" spc="-50" dirty="0"/>
@@ -7673,19 +7681,19 @@
             </a:pPr>
             <a:r>
               <a:rPr lang="ko-KR" altLang="en-US" sz="1600" spc="-50" dirty="0"/>
-              <a:t>시장이 독과점 상태이거나</a:t>
-            </a:r>
-            <a:r>
-              <a:rPr lang="en-US" altLang="ko-KR" sz="1600" spc="-50" dirty="0"/>
-              <a:t>, </a:t>
-            </a:r>
-            <a:r>
-              <a:rPr lang="ko-KR" altLang="en-US" sz="1600" spc="-50" dirty="0"/>
-              <a:t>완전경쟁시장이라 하더라도 그 결과가 공평한 분배를 보장하지 않는다</a:t>
-            </a:r>
-            <a:r>
-              <a:rPr lang="en-US" altLang="ko-KR" sz="1600" spc="-50" dirty="0"/>
-              <a:t>.</a:t>
+              <a:t>일련의 조건이 충족되지 않으면 시장 실패가 발생한다</a:t>
+            </a:r>
+            <a:r>
+              <a:rPr lang="en-US" altLang="ko-KR" sz="1600" spc="-50" dirty="0"/>
+              <a:t>. (3</a:t>
+            </a:r>
+            <a:r>
+              <a:rPr lang="ko-KR" altLang="en-US" sz="1600" spc="-50" dirty="0"/>
+              <a:t>장에서 자세히 다룰 예정</a:t>
+            </a:r>
+            <a:r>
+              <a:rPr lang="en-US" altLang="ko-KR" sz="1600" spc="-50" dirty="0"/>
+              <a:t>)</a:t>
             </a:r>
           </a:p>
           <a:p>
@@ -7698,15 +7706,7 @@
             </a:pPr>
             <a:r>
               <a:rPr lang="ko-KR" altLang="en-US" sz="1600" spc="-50" dirty="0"/>
-              <a:t>시장기구는 효율적인 자원배분을 가능케 한다고 배웠지만</a:t>
-            </a:r>
-            <a:r>
-              <a:rPr lang="en-US" altLang="ko-KR" sz="1600" spc="-50" dirty="0"/>
-              <a:t>, </a:t>
-            </a:r>
-            <a:r>
-              <a:rPr lang="ko-KR" altLang="en-US" sz="1600" spc="-50" dirty="0"/>
-              <a:t>일련의 이상적인 조건이 충족되어 있을 때를 전제로 한다</a:t>
+              <a:t>시장기구는 소득과 재산을 공평하게 분배한다는 보장이 없다는 문제점을 지적할 수 있다</a:t>
             </a:r>
             <a:r>
               <a:rPr lang="en-US" altLang="ko-KR" sz="1600" spc="-50" dirty="0"/>
@@ -7723,19 +7723,19 @@
             </a:pPr>
             <a:r>
               <a:rPr lang="ko-KR" altLang="en-US" sz="1600" spc="-50" dirty="0"/>
-              <a:t>일련의 조건이 충족되지 않으면 시장 실패가 발생한다</a:t>
-            </a:r>
-            <a:r>
-              <a:rPr lang="en-US" altLang="ko-KR" sz="1600" spc="-50" dirty="0"/>
-              <a:t>. (3</a:t>
-            </a:r>
-            <a:r>
-              <a:rPr lang="ko-KR" altLang="en-US" sz="1600" spc="-50" dirty="0"/>
-              <a:t>장에서 자세히 다룰 예정</a:t>
-            </a:r>
-            <a:r>
-              <a:rPr lang="en-US" altLang="ko-KR" sz="1600" spc="-50" dirty="0"/>
-              <a:t>)</a:t>
+              <a:t>시장이 독과점 상태이거나</a:t>
+            </a:r>
+            <a:r>
+              <a:rPr lang="en-US" altLang="ko-KR" sz="1600" spc="-50" dirty="0"/>
+              <a:t>, </a:t>
+            </a:r>
+            <a:r>
+              <a:rPr lang="ko-KR" altLang="en-US" sz="1600" spc="-50" dirty="0"/>
+              <a:t>완전경쟁시장이라 하더라도 그 결과가 공평한 분배를 보장하지 않는다</a:t>
+            </a:r>
+            <a:r>
+              <a:rPr lang="en-US" altLang="ko-KR" sz="1600" spc="-50" dirty="0"/>
+              <a:t>.</a:t>
             </a:r>
           </a:p>
           <a:p>
@@ -8339,9 +8339,20 @@
             </a:r>
             <a:r>
               <a:rPr lang="ko-KR" altLang="en-US" sz="1600" spc="-50" dirty="0"/>
-              <a:t>사회의 경제적 자원을 적절한 용도로 배분하는 일</a:t>
-            </a:r>
-            <a:endParaRPr lang="en-US" altLang="ko-KR" sz="1600" spc="-50" dirty="0"/>
+              <a:t>사회의 경제적 자원을 적절한 용도로 배분하는 일 </a:t>
+            </a:r>
+            <a:r>
+              <a:rPr lang="en-US" altLang="ko-KR" sz="1600" spc="-50" dirty="0"/>
+              <a:t>(</a:t>
+            </a:r>
+            <a:r>
+              <a:rPr lang="ko-KR" altLang="en-US" sz="1600" spc="-50" dirty="0"/>
+              <a:t>자원을 어디에 얼마나 쓸까</a:t>
+            </a:r>
+            <a:r>
+              <a:rPr lang="en-US" altLang="ko-KR" sz="1600" spc="-50" dirty="0"/>
+              <a:t>?)</a:t>
+            </a:r>
           </a:p>
           <a:p>
             <a:pPr marL="835025" lvl="1" indent="-285750">
@@ -8394,9 +8405,20 @@
             </a:r>
             <a:r>
               <a:rPr lang="ko-KR" altLang="en-US" sz="1600" spc="-50" dirty="0"/>
-              <a:t>생산된 재화와 서비스를 사회 구성원들에게 공평하게 나눌 수 있는 방법을 찾는 일</a:t>
-            </a:r>
-            <a:endParaRPr lang="en-US" altLang="ko-KR" sz="1600" spc="-50" dirty="0"/>
+              <a:t>생산된 재화와 서비스를 사회 구성원들에게 공평하게 나눌 수 있는 방법을 찾는 일 </a:t>
+            </a:r>
+            <a:r>
+              <a:rPr lang="en-US" altLang="ko-KR" sz="1600" spc="-50" dirty="0"/>
+              <a:t>(</a:t>
+            </a:r>
+            <a:r>
+              <a:rPr lang="ko-KR" altLang="en-US" sz="1600" spc="-50" dirty="0"/>
+              <a:t>누가 얼마나 갖는가</a:t>
+            </a:r>
+            <a:r>
+              <a:rPr lang="en-US" altLang="ko-KR" sz="1600" spc="-50" dirty="0"/>
+              <a:t>?)</a:t>
+            </a:r>
           </a:p>
           <a:p>
             <a:pPr marL="835025" lvl="1" indent="-285750">
@@ -8442,7 +8464,15 @@
             </a:pPr>
             <a:r>
               <a:rPr lang="ko-KR" altLang="en-US" sz="1600" spc="-50" dirty="0"/>
-              <a:t>경제안정 경제가 안정적으로 성장할 수 있는 여건을 조성하는 일</a:t>
+              <a:t>경제안정</a:t>
+            </a:r>
+            <a:r>
+              <a:rPr lang="en-US" altLang="ko-KR" sz="1600" spc="-50" dirty="0"/>
+              <a:t>:</a:t>
+            </a:r>
+            <a:r>
+              <a:rPr lang="ko-KR" altLang="en-US" sz="1600" spc="-50" dirty="0"/>
+              <a:t> 경제가 안정적으로 성장할 수 있는 여건을 조성하는 일</a:t>
             </a:r>
             <a:endParaRPr lang="en-US" altLang="ko-KR" sz="1600" spc="-50" dirty="0"/>
           </a:p>
@@ -9331,7 +9361,7 @@
         <p:spPr>
           <a:xfrm>
             <a:off x="288790" y="958844"/>
-            <a:ext cx="11693660" cy="3091680"/>
+            <a:ext cx="11693660" cy="3368679"/>
           </a:xfrm>
           <a:prstGeom prst="rect">
             <a:avLst/>
@@ -9480,6 +9510,23 @@
             <a:endParaRPr lang="en-US" altLang="ko-KR" sz="1600" spc="-50" dirty="0"/>
           </a:p>
           <a:p>
+            <a:pPr marL="377825" indent="-285750">
+              <a:lnSpc>
+                <a:spcPct val="150000"/>
+              </a:lnSpc>
+              <a:buFont typeface="Arial" panose="020B0604020202020204" pitchFamily="34" charset="0"/>
+              <a:buChar char="•"/>
+            </a:pPr>
+            <a:r>
+              <a:rPr lang="ko-KR" altLang="en-US" sz="1600" spc="-50" dirty="0"/>
+              <a:t>다만 최근 미국은 관세 정책이라는 보호무역을 통해 자국 산업을 보호하려고 있다</a:t>
+            </a:r>
+            <a:r>
+              <a:rPr lang="en-US" altLang="ko-KR" sz="1600" spc="-50" dirty="0"/>
+              <a:t>.</a:t>
+            </a:r>
+          </a:p>
+          <a:p>
             <a:pPr marL="835025" lvl="1" indent="-285750">
               <a:lnSpc>
                 <a:spcPct val="150000"/>
@@ -9487,6 +9534,22 @@
               <a:buFont typeface="Wingdings" panose="05000000000000000000" pitchFamily="2" charset="2"/>
               <a:buChar char="ü"/>
             </a:pPr>
+            <a:r>
+              <a:rPr lang="ko-KR" altLang="en-US" sz="1600" spc="-50" dirty="0"/>
+              <a:t>이는 세계화가 더디어 지고 있음을 의미하지는 않고</a:t>
+            </a:r>
+            <a:r>
+              <a:rPr lang="en-US" altLang="ko-KR" sz="1600" spc="-50" dirty="0"/>
+              <a:t>, </a:t>
+            </a:r>
+            <a:r>
+              <a:rPr lang="ko-KR" altLang="en-US" sz="1600" spc="-50" dirty="0"/>
+              <a:t>세계화 속에서 경쟁하는 방식이 변화하고 있음을 의미한다</a:t>
+            </a:r>
+            <a:r>
+              <a:rPr lang="en-US" altLang="ko-KR" sz="1600" spc="-50"/>
+              <a:t>.</a:t>
+            </a:r>
             <a:endParaRPr lang="en-US" altLang="ko-KR" sz="1600" spc="-50" dirty="0"/>
           </a:p>
         </p:txBody>
@@ -10756,7 +10819,15 @@
             </a:r>
             <a:r>
               <a:rPr lang="ko-KR" altLang="en-US" sz="1600" spc="-50" dirty="0"/>
-              <a:t>주관식 포함</a:t>
+              <a:t>주관식</a:t>
+            </a:r>
+            <a:r>
+              <a:rPr lang="en-US" altLang="ko-KR" sz="1600" spc="-50" dirty="0"/>
+              <a:t>, </a:t>
+            </a:r>
+            <a:r>
+              <a:rPr lang="ko-KR" altLang="en-US" sz="1600" spc="-50" dirty="0"/>
+              <a:t>서술형 포함</a:t>
             </a:r>
             <a:r>
               <a:rPr lang="en-US" altLang="ko-KR" sz="1600" spc="-50" dirty="0"/>
@@ -13907,7 +13978,15 @@
             </a:pPr>
             <a:r>
               <a:rPr lang="ko-KR" altLang="en-US" sz="1600" spc="-50" dirty="0"/>
-              <a:t>국민이 직접 선출한 사람이나 선출된 사람에 의해 임명된 사람들이 운영의 책임을 맡고 있다</a:t>
+              <a:t>국민이 직접 선출한 사람</a:t>
+            </a:r>
+            <a:r>
+              <a:rPr lang="en-US" altLang="ko-KR" sz="1600" spc="-50" dirty="0"/>
+              <a:t>, </a:t>
+            </a:r>
+            <a:r>
+              <a:rPr lang="ko-KR" altLang="en-US" sz="1600" spc="-50" dirty="0"/>
+              <a:t>혹은 그 선출된 사람이 임명한 사람들이 운영의 책임을 맡고 있다</a:t>
             </a:r>
             <a:r>
               <a:rPr lang="en-US" altLang="ko-KR" sz="1600" spc="-50" dirty="0"/>
@@ -14344,7 +14423,10 @@
               <a:rPr lang="ko-KR" altLang="en-US" sz="1600" spc="-50" dirty="0"/>
               <a:t>그 목표달성을 위해 개인이 동원될 수 있다고 볼 수 없다는 의견이다</a:t>
             </a:r>
-            <a:endParaRPr lang="en-US" altLang="ko-KR" sz="1600" spc="-50" dirty="0"/>
+            <a:r>
+              <a:rPr lang="en-US" altLang="ko-KR" sz="1600" spc="-50" dirty="0"/>
+              <a:t>.</a:t>
+            </a:r>
           </a:p>
           <a:p>
             <a:pPr marL="377825" indent="-285750">

--- a/재정학/01_Lectures/재정학_Chapter_1.pptx
+++ b/재정학/01_Lectures/재정학_Chapter_1.pptx
@@ -5,32 +5,31 @@
     <p:sldMasterId id="2147483648" r:id="rId1"/>
   </p:sldMasterIdLst>
   <p:notesMasterIdLst>
-    <p:notesMasterId r:id="rId25"/>
+    <p:notesMasterId r:id="rId24"/>
   </p:notesMasterIdLst>
   <p:sldIdLst>
     <p:sldId id="375" r:id="rId2"/>
-    <p:sldId id="400" r:id="rId3"/>
-    <p:sldId id="405" r:id="rId4"/>
-    <p:sldId id="377" r:id="rId5"/>
-    <p:sldId id="550" r:id="rId6"/>
-    <p:sldId id="376" r:id="rId7"/>
-    <p:sldId id="551" r:id="rId8"/>
-    <p:sldId id="552" r:id="rId9"/>
-    <p:sldId id="553" r:id="rId10"/>
-    <p:sldId id="557" r:id="rId11"/>
-    <p:sldId id="556" r:id="rId12"/>
-    <p:sldId id="558" r:id="rId13"/>
-    <p:sldId id="559" r:id="rId14"/>
-    <p:sldId id="560" r:id="rId15"/>
-    <p:sldId id="562" r:id="rId16"/>
-    <p:sldId id="563" r:id="rId17"/>
-    <p:sldId id="564" r:id="rId18"/>
-    <p:sldId id="565" r:id="rId19"/>
-    <p:sldId id="566" r:id="rId20"/>
-    <p:sldId id="567" r:id="rId21"/>
-    <p:sldId id="568" r:id="rId22"/>
-    <p:sldId id="569" r:id="rId23"/>
-    <p:sldId id="364" r:id="rId24"/>
+    <p:sldId id="405" r:id="rId3"/>
+    <p:sldId id="377" r:id="rId4"/>
+    <p:sldId id="550" r:id="rId5"/>
+    <p:sldId id="376" r:id="rId6"/>
+    <p:sldId id="551" r:id="rId7"/>
+    <p:sldId id="552" r:id="rId8"/>
+    <p:sldId id="553" r:id="rId9"/>
+    <p:sldId id="557" r:id="rId10"/>
+    <p:sldId id="556" r:id="rId11"/>
+    <p:sldId id="558" r:id="rId12"/>
+    <p:sldId id="559" r:id="rId13"/>
+    <p:sldId id="560" r:id="rId14"/>
+    <p:sldId id="562" r:id="rId15"/>
+    <p:sldId id="563" r:id="rId16"/>
+    <p:sldId id="564" r:id="rId17"/>
+    <p:sldId id="565" r:id="rId18"/>
+    <p:sldId id="566" r:id="rId19"/>
+    <p:sldId id="567" r:id="rId20"/>
+    <p:sldId id="568" r:id="rId21"/>
+    <p:sldId id="569" r:id="rId22"/>
+    <p:sldId id="364" r:id="rId23"/>
   </p:sldIdLst>
   <p:sldSz cx="12192000" cy="6858000"/>
   <p:notesSz cx="6858000" cy="9144000"/>
@@ -230,7 +229,7 @@
           <a:p>
             <a:fld id="{4A5E00EF-AEA4-43E2-9451-8F9C59A39471}" type="datetimeFigureOut">
               <a:rPr lang="ko-KR" altLang="en-US" smtClean="0"/>
-              <a:t>2026-02-25</a:t>
+              <a:t>2026-03-12</a:t>
             </a:fld>
             <a:endParaRPr lang="ko-KR" altLang="en-US"/>
           </a:p>
@@ -652,7 +651,7 @@
           <a:p>
             <a:fld id="{CD32C56F-BD27-4999-9E6D-D4EACE3DA9F4}" type="datetime1">
               <a:rPr lang="ko-KR" altLang="en-US" smtClean="0"/>
-              <a:t>2026-02-25</a:t>
+              <a:t>2026-03-12</a:t>
             </a:fld>
             <a:endParaRPr lang="ko-KR" altLang="en-US"/>
           </a:p>
@@ -866,7 +865,7 @@
           <a:p>
             <a:fld id="{8EF4A19C-72C8-45CA-8E3F-68A7FA345D6C}" type="datetime1">
               <a:rPr lang="ko-KR" altLang="en-US" smtClean="0"/>
-              <a:t>2026-02-25</a:t>
+              <a:t>2026-03-12</a:t>
             </a:fld>
             <a:endParaRPr lang="ko-KR" altLang="en-US"/>
           </a:p>
@@ -1090,7 +1089,7 @@
           <a:p>
             <a:fld id="{56A175B2-010B-4341-954C-5F8F5C70B124}" type="datetime1">
               <a:rPr lang="ko-KR" altLang="en-US" smtClean="0"/>
-              <a:t>2026-02-25</a:t>
+              <a:t>2026-03-12</a:t>
             </a:fld>
             <a:endParaRPr lang="ko-KR" altLang="en-US"/>
           </a:p>
@@ -1304,7 +1303,7 @@
           <a:p>
             <a:fld id="{16B83F9E-22C9-45CA-9E85-070F1D3EF530}" type="datetime1">
               <a:rPr lang="ko-KR" altLang="en-US" smtClean="0"/>
-              <a:t>2026-02-25</a:t>
+              <a:t>2026-03-12</a:t>
             </a:fld>
             <a:endParaRPr lang="ko-KR" altLang="en-US"/>
           </a:p>
@@ -1595,7 +1594,7 @@
           <a:p>
             <a:fld id="{03278F45-FB3C-4C4D-B89A-7BC3F5F229F6}" type="datetime1">
               <a:rPr lang="ko-KR" altLang="en-US" smtClean="0"/>
-              <a:t>2026-02-25</a:t>
+              <a:t>2026-03-12</a:t>
             </a:fld>
             <a:endParaRPr lang="ko-KR" altLang="en-US"/>
           </a:p>
@@ -1988,7 +1987,7 @@
           <a:p>
             <a:fld id="{38FDAC3C-35A6-415C-9F03-738A6AC328B1}" type="datetime1">
               <a:rPr lang="ko-KR" altLang="en-US" smtClean="0"/>
-              <a:t>2026-02-25</a:t>
+              <a:t>2026-03-12</a:t>
             </a:fld>
             <a:endParaRPr lang="ko-KR" altLang="en-US"/>
           </a:p>
@@ -3582,7 +3581,7 @@
           <a:p>
             <a:fld id="{507A0DF1-AEE6-4B0D-89D2-351E7B3EF65C}" type="datetime1">
               <a:rPr lang="ko-KR" altLang="en-US" smtClean="0"/>
-              <a:t>2026-02-25</a:t>
+              <a:t>2026-03-12</a:t>
             </a:fld>
             <a:endParaRPr lang="ko-KR" altLang="en-US"/>
           </a:p>
@@ -4010,7 +4009,7 @@
           <a:p>
             <a:fld id="{CA93B8C9-630F-4D57-944D-04FD37CECCD3}" type="datetime1">
               <a:rPr lang="ko-KR" altLang="en-US" smtClean="0"/>
-              <a:t>2026-02-25</a:t>
+              <a:t>2026-03-12</a:t>
             </a:fld>
             <a:endParaRPr lang="ko-KR" altLang="en-US"/>
           </a:p>
@@ -4167,7 +4166,7 @@
           <a:p>
             <a:fld id="{E986165A-AC43-4902-9541-874ECD310BA3}" type="datetime1">
               <a:rPr lang="ko-KR" altLang="en-US" smtClean="0"/>
-              <a:t>2026-02-25</a:t>
+              <a:t>2026-03-12</a:t>
             </a:fld>
             <a:endParaRPr lang="ko-KR" altLang="en-US"/>
           </a:p>
@@ -4494,7 +4493,7 @@
           <a:p>
             <a:fld id="{47E6EE6D-2B0E-43A9-87A2-7354CDB998F4}" type="datetime1">
               <a:rPr lang="ko-KR" altLang="en-US" smtClean="0"/>
-              <a:t>2026-02-25</a:t>
+              <a:t>2026-03-12</a:t>
             </a:fld>
             <a:endParaRPr lang="ko-KR" altLang="en-US"/>
           </a:p>
@@ -4798,7 +4797,7 @@
           <a:p>
             <a:fld id="{5CC5944E-0BC8-4FAA-9F94-6B4B05834E10}" type="datetime1">
               <a:rPr lang="ko-KR" altLang="en-US" smtClean="0"/>
-              <a:t>2026-02-25</a:t>
+              <a:t>2026-03-12</a:t>
             </a:fld>
             <a:endParaRPr lang="ko-KR" altLang="en-US"/>
           </a:p>
@@ -7232,149 +7231,6 @@
         <p:cNvPr id="1" name="">
           <a:extLst>
             <a:ext uri="{FF2B5EF4-FFF2-40B4-BE49-F238E27FC236}">
-              <a16:creationId xmlns:a16="http://schemas.microsoft.com/office/drawing/2014/main" id="{29209412-C19A-4290-3307-F76585F2784C}"/>
-            </a:ext>
-          </a:extLst>
-        </p:cNvPr>
-        <p:cNvGrpSpPr/>
-        <p:nvPr/>
-      </p:nvGrpSpPr>
-      <p:grpSpPr>
-        <a:xfrm>
-          <a:off x="0" y="0"/>
-          <a:ext cx="0" cy="0"/>
-          <a:chOff x="0" y="0"/>
-          <a:chExt cx="0" cy="0"/>
-        </a:xfrm>
-      </p:grpSpPr>
-      <p:pic>
-        <p:nvPicPr>
-          <p:cNvPr id="6" name="그림 5" descr="텍스트, 로고, 원, 폰트이(가) 표시된 사진&#10;&#10;AI 생성 콘텐츠는 정확하지 않을 수 있습니다.">
-            <a:extLst>
-              <a:ext uri="{FF2B5EF4-FFF2-40B4-BE49-F238E27FC236}">
-                <a16:creationId xmlns:a16="http://schemas.microsoft.com/office/drawing/2014/main" id="{D488FA50-5A64-CB2C-A9CC-AC1B6182F7B6}"/>
-              </a:ext>
-            </a:extLst>
-          </p:cNvPr>
-          <p:cNvPicPr>
-            <a:picLocks noChangeAspect="1"/>
-          </p:cNvPicPr>
-          <p:nvPr/>
-        </p:nvPicPr>
-        <p:blipFill>
-          <a:blip r:embed="rId2">
-            <a:alphaModFix amt="20000"/>
-            <a:extLst>
-              <a:ext uri="{28A0092B-C50C-407E-A947-70E740481C1C}">
-                <a14:useLocalDpi xmlns:a14="http://schemas.microsoft.com/office/drawing/2010/main" val="0"/>
-              </a:ext>
-            </a:extLst>
-          </a:blip>
-          <a:stretch>
-            <a:fillRect/>
-          </a:stretch>
-        </p:blipFill>
-        <p:spPr>
-          <a:xfrm>
-            <a:off x="4012070" y="1673061"/>
-            <a:ext cx="4167861" cy="4167861"/>
-          </a:xfrm>
-          <a:prstGeom prst="rect">
-            <a:avLst/>
-          </a:prstGeom>
-        </p:spPr>
-      </p:pic>
-      <p:sp>
-        <p:nvSpPr>
-          <p:cNvPr id="4" name="슬라이드 번호 개체 틀 3">
-            <a:extLst>
-              <a:ext uri="{FF2B5EF4-FFF2-40B4-BE49-F238E27FC236}">
-                <a16:creationId xmlns:a16="http://schemas.microsoft.com/office/drawing/2014/main" id="{4EFBBE6E-76A7-CC95-FDC2-5AFB7A5D4434}"/>
-              </a:ext>
-            </a:extLst>
-          </p:cNvPr>
-          <p:cNvSpPr>
-            <a:spLocks noGrp="1"/>
-          </p:cNvSpPr>
-          <p:nvPr>
-            <p:ph type="sldNum" sz="quarter" idx="12"/>
-          </p:nvPr>
-        </p:nvSpPr>
-        <p:spPr/>
-        <p:txBody>
-          <a:bodyPr/>
-          <a:lstStyle/>
-          <a:p>
-            <a:fld id="{109C872D-39A9-4065-8BF3-6A613116E2A1}" type="slidenum">
-              <a:rPr lang="ko-KR" altLang="en-US" smtClean="0"/>
-              <a:t>10</a:t>
-            </a:fld>
-            <a:endParaRPr lang="ko-KR" altLang="en-US"/>
-          </a:p>
-        </p:txBody>
-      </p:sp>
-      <p:sp>
-        <p:nvSpPr>
-          <p:cNvPr id="7" name="제목 1">
-            <a:extLst>
-              <a:ext uri="{FF2B5EF4-FFF2-40B4-BE49-F238E27FC236}">
-                <a16:creationId xmlns:a16="http://schemas.microsoft.com/office/drawing/2014/main" id="{48298C76-ECF9-2277-6763-6ECCF0FAAA53}"/>
-              </a:ext>
-            </a:extLst>
-          </p:cNvPr>
-          <p:cNvSpPr>
-            <a:spLocks noGrp="1"/>
-          </p:cNvSpPr>
-          <p:nvPr>
-            <p:ph type="title"/>
-          </p:nvPr>
-        </p:nvSpPr>
-        <p:spPr>
-          <a:xfrm>
-            <a:off x="831850" y="3765550"/>
-            <a:ext cx="11150600" cy="652818"/>
-          </a:xfrm>
-          <a:effectLst>
-            <a:reflection blurRad="50800" stA="45000" endPos="44000" dir="5400000" sy="-100000" algn="bl" rotWithShape="0"/>
-          </a:effectLst>
-        </p:spPr>
-        <p:txBody>
-          <a:bodyPr anchor="b"/>
-          <a:lstStyle/>
-          <a:p>
-            <a:r>
-              <a:rPr lang="en-US" altLang="ko-KR" sz="4000" b="1" i="0" spc="150" dirty="0"/>
-              <a:t>Section 3. </a:t>
-            </a:r>
-            <a:r>
-              <a:rPr lang="ko-KR" altLang="en-US" sz="4000" b="1" i="0" spc="150" dirty="0"/>
-              <a:t>혼합경제와 정부의 역할</a:t>
-            </a:r>
-            <a:endParaRPr lang="ko-KR" altLang="en-US" sz="3600" i="0" spc="150" dirty="0"/>
-          </a:p>
-        </p:txBody>
-      </p:sp>
-    </p:spTree>
-    <p:extLst>
-      <p:ext uri="{BB962C8B-B14F-4D97-AF65-F5344CB8AC3E}">
-        <p14:creationId xmlns:p14="http://schemas.microsoft.com/office/powerpoint/2010/main" val="3680565374"/>
-      </p:ext>
-    </p:extLst>
-  </p:cSld>
-  <p:clrMapOvr>
-    <a:masterClrMapping/>
-  </p:clrMapOvr>
-</p:sld>
-</file>
-
-<file path=ppt/slides/slide11.xml><?xml version="1.0" encoding="utf-8"?>
-<p:sld xmlns:a="http://schemas.openxmlformats.org/drawingml/2006/main" xmlns:r="http://schemas.openxmlformats.org/officeDocument/2006/relationships" xmlns:p="http://schemas.openxmlformats.org/presentationml/2006/main">
-  <p:cSld>
-    <p:spTree>
-      <p:nvGrpSpPr>
-        <p:cNvPr id="1" name="">
-          <a:extLst>
-            <a:ext uri="{FF2B5EF4-FFF2-40B4-BE49-F238E27FC236}">
               <a16:creationId xmlns:a16="http://schemas.microsoft.com/office/drawing/2014/main" id="{9DC9BACB-E6BF-295D-1F84-9A59920D9C40}"/>
             </a:ext>
           </a:extLst>
@@ -7441,7 +7297,7 @@
           <a:p>
             <a:fld id="{109C872D-39A9-4065-8BF3-6A613116E2A1}" type="slidenum">
               <a:rPr lang="ko-KR" altLang="en-US" smtClean="0"/>
-              <a:t>11</a:t>
+              <a:t>10</a:t>
             </a:fld>
             <a:endParaRPr lang="ko-KR" altLang="en-US"/>
           </a:p>
@@ -7778,7 +7634,7 @@
 </p:sld>
 </file>
 
-<file path=ppt/slides/slide12.xml><?xml version="1.0" encoding="utf-8"?>
+<file path=ppt/slides/slide11.xml><?xml version="1.0" encoding="utf-8"?>
 <p:sld xmlns:a="http://schemas.openxmlformats.org/drawingml/2006/main" xmlns:r="http://schemas.openxmlformats.org/officeDocument/2006/relationships" xmlns:p="http://schemas.openxmlformats.org/presentationml/2006/main">
   <p:cSld>
     <p:spTree>
@@ -7852,7 +7708,7 @@
           <a:p>
             <a:fld id="{109C872D-39A9-4065-8BF3-6A613116E2A1}" type="slidenum">
               <a:rPr lang="ko-KR" altLang="en-US" smtClean="0"/>
-              <a:t>12</a:t>
+              <a:t>11</a:t>
             </a:fld>
             <a:endParaRPr lang="ko-KR" altLang="en-US"/>
           </a:p>
@@ -8156,7 +8012,7 @@
 </p:sld>
 </file>
 
-<file path=ppt/slides/slide13.xml><?xml version="1.0" encoding="utf-8"?>
+<file path=ppt/slides/slide12.xml><?xml version="1.0" encoding="utf-8"?>
 <p:sld xmlns:a="http://schemas.openxmlformats.org/drawingml/2006/main" xmlns:r="http://schemas.openxmlformats.org/officeDocument/2006/relationships" xmlns:p="http://schemas.openxmlformats.org/presentationml/2006/main">
   <p:cSld>
     <p:spTree>
@@ -8230,7 +8086,7 @@
           <a:p>
             <a:fld id="{109C872D-39A9-4065-8BF3-6A613116E2A1}" type="slidenum">
               <a:rPr lang="ko-KR" altLang="en-US" smtClean="0"/>
-              <a:t>13</a:t>
+              <a:t>12</a:t>
             </a:fld>
             <a:endParaRPr lang="ko-KR" altLang="en-US"/>
           </a:p>
@@ -8617,7 +8473,7 @@
 </p:sld>
 </file>
 
-<file path=ppt/slides/slide14.xml><?xml version="1.0" encoding="utf-8"?>
+<file path=ppt/slides/slide13.xml><?xml version="1.0" encoding="utf-8"?>
 <p:sld xmlns:a="http://schemas.openxmlformats.org/drawingml/2006/main" xmlns:r="http://schemas.openxmlformats.org/officeDocument/2006/relationships" xmlns:p="http://schemas.openxmlformats.org/presentationml/2006/main">
   <p:cSld>
     <p:spTree>
@@ -8691,7 +8547,7 @@
           <a:p>
             <a:fld id="{109C872D-39A9-4065-8BF3-6A613116E2A1}" type="slidenum">
               <a:rPr lang="ko-KR" altLang="en-US" smtClean="0"/>
-              <a:t>14</a:t>
+              <a:t>13</a:t>
             </a:fld>
             <a:endParaRPr lang="ko-KR" altLang="en-US"/>
           </a:p>
@@ -9115,7 +8971,7 @@
 </p:sld>
 </file>
 
-<file path=ppt/slides/slide15.xml><?xml version="1.0" encoding="utf-8"?>
+<file path=ppt/slides/slide14.xml><?xml version="1.0" encoding="utf-8"?>
 <p:sld xmlns:a="http://schemas.openxmlformats.org/drawingml/2006/main" xmlns:r="http://schemas.openxmlformats.org/officeDocument/2006/relationships" xmlns:p="http://schemas.openxmlformats.org/presentationml/2006/main">
   <p:cSld>
     <p:spTree>
@@ -9198,7 +9054,7 @@
           <a:p>
             <a:fld id="{109C872D-39A9-4065-8BF3-6A613116E2A1}" type="slidenum">
               <a:rPr lang="ko-KR" altLang="en-US" smtClean="0"/>
-              <a:t>15</a:t>
+              <a:t>14</a:t>
             </a:fld>
             <a:endParaRPr lang="ko-KR" altLang="en-US"/>
           </a:p>
@@ -9266,7 +9122,7 @@
 </p:sld>
 </file>
 
-<file path=ppt/slides/slide16.xml><?xml version="1.0" encoding="utf-8"?>
+<file path=ppt/slides/slide15.xml><?xml version="1.0" encoding="utf-8"?>
 <p:sld xmlns:a="http://schemas.openxmlformats.org/drawingml/2006/main" xmlns:r="http://schemas.openxmlformats.org/officeDocument/2006/relationships" xmlns:p="http://schemas.openxmlformats.org/presentationml/2006/main">
   <p:cSld>
     <p:spTree>
@@ -9340,7 +9196,7 @@
           <a:p>
             <a:fld id="{109C872D-39A9-4065-8BF3-6A613116E2A1}" type="slidenum">
               <a:rPr lang="ko-KR" altLang="en-US" smtClean="0"/>
-              <a:t>16</a:t>
+              <a:t>15</a:t>
             </a:fld>
             <a:endParaRPr lang="ko-KR" altLang="en-US"/>
           </a:p>
@@ -9567,7 +9423,7 @@
 </p:sld>
 </file>
 
-<file path=ppt/slides/slide17.xml><?xml version="1.0" encoding="utf-8"?>
+<file path=ppt/slides/slide16.xml><?xml version="1.0" encoding="utf-8"?>
 <p:sld xmlns:a="http://schemas.openxmlformats.org/drawingml/2006/main" xmlns:r="http://schemas.openxmlformats.org/officeDocument/2006/relationships" xmlns:p="http://schemas.openxmlformats.org/presentationml/2006/main">
   <p:cSld>
     <p:spTree>
@@ -9641,7 +9497,7 @@
           <a:p>
             <a:fld id="{109C872D-39A9-4065-8BF3-6A613116E2A1}" type="slidenum">
               <a:rPr lang="ko-KR" altLang="en-US" smtClean="0"/>
-              <a:t>17</a:t>
+              <a:t>16</a:t>
             </a:fld>
             <a:endParaRPr lang="ko-KR" altLang="en-US"/>
           </a:p>
@@ -9981,7 +9837,7 @@
 </p:sld>
 </file>
 
-<file path=ppt/slides/slide18.xml><?xml version="1.0" encoding="utf-8"?>
+<file path=ppt/slides/slide17.xml><?xml version="1.0" encoding="utf-8"?>
 <p:sld xmlns:a="http://schemas.openxmlformats.org/drawingml/2006/main" xmlns:r="http://schemas.openxmlformats.org/officeDocument/2006/relationships" xmlns:p="http://schemas.openxmlformats.org/presentationml/2006/main">
   <p:cSld>
     <p:spTree>
@@ -10055,7 +9911,7 @@
           <a:p>
             <a:fld id="{109C872D-39A9-4065-8BF3-6A613116E2A1}" type="slidenum">
               <a:rPr lang="ko-KR" altLang="en-US" smtClean="0"/>
-              <a:t>18</a:t>
+              <a:t>17</a:t>
             </a:fld>
             <a:endParaRPr lang="ko-KR" altLang="en-US"/>
           </a:p>
@@ -10341,7 +10197,7 @@
 </p:sld>
 </file>
 
-<file path=ppt/slides/slide19.xml><?xml version="1.0" encoding="utf-8"?>
+<file path=ppt/slides/slide18.xml><?xml version="1.0" encoding="utf-8"?>
 <p:sld xmlns:a="http://schemas.openxmlformats.org/drawingml/2006/main" xmlns:r="http://schemas.openxmlformats.org/officeDocument/2006/relationships" xmlns:p="http://schemas.openxmlformats.org/presentationml/2006/main">
   <p:cSld>
     <p:spTree>
@@ -10424,7 +10280,7 @@
           <a:p>
             <a:fld id="{109C872D-39A9-4065-8BF3-6A613116E2A1}" type="slidenum">
               <a:rPr lang="ko-KR" altLang="en-US" smtClean="0"/>
-              <a:t>19</a:t>
+              <a:t>18</a:t>
             </a:fld>
             <a:endParaRPr lang="ko-KR" altLang="en-US"/>
           </a:p>
@@ -10484,480 +10340,7 @@
 </p:sld>
 </file>
 
-<file path=ppt/slides/slide2.xml><?xml version="1.0" encoding="utf-8"?>
-<p:sld xmlns:a="http://schemas.openxmlformats.org/drawingml/2006/main" xmlns:r="http://schemas.openxmlformats.org/officeDocument/2006/relationships" xmlns:p="http://schemas.openxmlformats.org/presentationml/2006/main">
-  <p:cSld>
-    <p:spTree>
-      <p:nvGrpSpPr>
-        <p:cNvPr id="1" name="">
-          <a:extLst>
-            <a:ext uri="{FF2B5EF4-FFF2-40B4-BE49-F238E27FC236}">
-              <a16:creationId xmlns:a16="http://schemas.microsoft.com/office/drawing/2014/main" id="{ACB77C8A-9F0F-FC0C-1D76-A3F32B69E2BF}"/>
-            </a:ext>
-          </a:extLst>
-        </p:cNvPr>
-        <p:cNvGrpSpPr/>
-        <p:nvPr/>
-      </p:nvGrpSpPr>
-      <p:grpSpPr>
-        <a:xfrm>
-          <a:off x="0" y="0"/>
-          <a:ext cx="0" cy="0"/>
-          <a:chOff x="0" y="0"/>
-          <a:chExt cx="0" cy="0"/>
-        </a:xfrm>
-      </p:grpSpPr>
-      <p:sp>
-        <p:nvSpPr>
-          <p:cNvPr id="2" name="제목 1">
-            <a:extLst>
-              <a:ext uri="{FF2B5EF4-FFF2-40B4-BE49-F238E27FC236}">
-                <a16:creationId xmlns:a16="http://schemas.microsoft.com/office/drawing/2014/main" id="{D93A045F-2B00-83E6-B256-8A0B61009790}"/>
-              </a:ext>
-            </a:extLst>
-          </p:cNvPr>
-          <p:cNvSpPr>
-            <a:spLocks noGrp="1"/>
-          </p:cNvSpPr>
-          <p:nvPr>
-            <p:ph type="title"/>
-          </p:nvPr>
-        </p:nvSpPr>
-        <p:spPr/>
-        <p:txBody>
-          <a:bodyPr/>
-          <a:lstStyle/>
-          <a:p>
-            <a:r>
-              <a:rPr lang="ko-KR" altLang="en-US" dirty="0"/>
-              <a:t>수업개요</a:t>
-            </a:r>
-          </a:p>
-        </p:txBody>
-      </p:sp>
-      <p:sp>
-        <p:nvSpPr>
-          <p:cNvPr id="4" name="슬라이드 번호 개체 틀 3">
-            <a:extLst>
-              <a:ext uri="{FF2B5EF4-FFF2-40B4-BE49-F238E27FC236}">
-                <a16:creationId xmlns:a16="http://schemas.microsoft.com/office/drawing/2014/main" id="{56EC8D9F-C285-F5E4-1C11-93C8B7EF625F}"/>
-              </a:ext>
-            </a:extLst>
-          </p:cNvPr>
-          <p:cNvSpPr>
-            <a:spLocks noGrp="1"/>
-          </p:cNvSpPr>
-          <p:nvPr>
-            <p:ph type="sldNum" sz="quarter" idx="12"/>
-          </p:nvPr>
-        </p:nvSpPr>
-        <p:spPr/>
-        <p:txBody>
-          <a:bodyPr/>
-          <a:lstStyle/>
-          <a:p>
-            <a:fld id="{109C872D-39A9-4065-8BF3-6A613116E2A1}" type="slidenum">
-              <a:rPr lang="ko-KR" altLang="en-US" smtClean="0"/>
-              <a:t>2</a:t>
-            </a:fld>
-            <a:endParaRPr lang="ko-KR" altLang="en-US"/>
-          </a:p>
-        </p:txBody>
-      </p:sp>
-      <p:sp>
-        <p:nvSpPr>
-          <p:cNvPr id="5" name="TextBox 4">
-            <a:extLst>
-              <a:ext uri="{FF2B5EF4-FFF2-40B4-BE49-F238E27FC236}">
-                <a16:creationId xmlns:a16="http://schemas.microsoft.com/office/drawing/2014/main" id="{78638085-6655-CBDE-0744-0787D69186BA}"/>
-              </a:ext>
-            </a:extLst>
-          </p:cNvPr>
-          <p:cNvSpPr txBox="1"/>
-          <p:nvPr/>
-        </p:nvSpPr>
-        <p:spPr>
-          <a:xfrm>
-            <a:off x="678872" y="1038536"/>
-            <a:ext cx="10975831" cy="5261505"/>
-          </a:xfrm>
-          <a:prstGeom prst="rect">
-            <a:avLst/>
-          </a:prstGeom>
-          <a:noFill/>
-        </p:spPr>
-        <p:txBody>
-          <a:bodyPr wrap="square" rtlCol="0" anchor="t">
-            <a:spAutoFit/>
-          </a:bodyPr>
-          <a:lstStyle/>
-          <a:p>
-            <a:pPr>
-              <a:lnSpc>
-                <a:spcPct val="150000"/>
-              </a:lnSpc>
-            </a:pPr>
-            <a:r>
-              <a:rPr lang="ko-KR" altLang="en-US" u="sng" dirty="0">
-                <a:ln w="3175">
-                  <a:noFill/>
-                </a:ln>
-                <a:latin typeface="HY헤드라인M" panose="02030600000101010101" pitchFamily="18" charset="-127"/>
-                <a:ea typeface="HY헤드라인M" panose="02030600000101010101" pitchFamily="18" charset="-127"/>
-              </a:rPr>
-              <a:t>수업 운영 방식</a:t>
-            </a:r>
-            <a:endParaRPr lang="en-US" altLang="ko-KR" u="sng" dirty="0">
-              <a:ln w="3175">
-                <a:noFill/>
-              </a:ln>
-              <a:latin typeface="HY헤드라인M" panose="02030600000101010101" pitchFamily="18" charset="-127"/>
-              <a:ea typeface="HY헤드라인M" panose="02030600000101010101" pitchFamily="18" charset="-127"/>
-            </a:endParaRPr>
-          </a:p>
-          <a:p>
-            <a:pPr>
-              <a:lnSpc>
-                <a:spcPct val="150000"/>
-              </a:lnSpc>
-            </a:pPr>
-            <a:endParaRPr lang="en-US" altLang="ko-KR" sz="400" u="sng" dirty="0">
-              <a:ln w="3175">
-                <a:noFill/>
-              </a:ln>
-              <a:latin typeface="HY헤드라인M" panose="02030600000101010101" pitchFamily="18" charset="-127"/>
-              <a:ea typeface="HY헤드라인M" panose="02030600000101010101" pitchFamily="18" charset="-127"/>
-            </a:endParaRPr>
-          </a:p>
-          <a:p>
-            <a:pPr marL="377825" indent="-285750">
-              <a:lnSpc>
-                <a:spcPct val="150000"/>
-              </a:lnSpc>
-              <a:buFont typeface="Wingdings" panose="05000000000000000000" pitchFamily="2" charset="2"/>
-              <a:buChar char="ü"/>
-            </a:pPr>
-            <a:r>
-              <a:rPr lang="ko-KR" altLang="en-US" sz="1600" spc="-50" dirty="0"/>
-              <a:t>강의 중심의 수업</a:t>
-            </a:r>
-            <a:endParaRPr lang="en-US" altLang="ko-KR" sz="1600" spc="-50" dirty="0"/>
-          </a:p>
-          <a:p>
-            <a:pPr marL="377825" indent="-285750">
-              <a:lnSpc>
-                <a:spcPct val="150000"/>
-              </a:lnSpc>
-              <a:buFont typeface="Wingdings" panose="05000000000000000000" pitchFamily="2" charset="2"/>
-              <a:buChar char="ü"/>
-            </a:pPr>
-            <a:r>
-              <a:rPr lang="ko-KR" altLang="en-US" sz="1600" spc="-50" dirty="0"/>
-              <a:t>수업 중 언제든지 어떤 주제도 질문 가능</a:t>
-            </a:r>
-            <a:endParaRPr lang="en-US" altLang="ko-KR" sz="1600" spc="-50" dirty="0"/>
-          </a:p>
-          <a:p>
-            <a:pPr marL="377825" indent="-285750">
-              <a:lnSpc>
-                <a:spcPct val="150000"/>
-              </a:lnSpc>
-              <a:buFont typeface="Wingdings" panose="05000000000000000000" pitchFamily="2" charset="2"/>
-              <a:buChar char="ü"/>
-            </a:pPr>
-            <a:r>
-              <a:rPr lang="ko-KR" altLang="en-US" sz="1600" spc="-50" dirty="0"/>
-              <a:t>취식 가능 </a:t>
-            </a:r>
-            <a:r>
-              <a:rPr lang="en-US" altLang="ko-KR" sz="1600" spc="-50" dirty="0"/>
-              <a:t>(</a:t>
-            </a:r>
-            <a:r>
-              <a:rPr lang="ko-KR" altLang="en-US" sz="1600" spc="-50" dirty="0"/>
-              <a:t>냄새만 심하게 안나면</a:t>
-            </a:r>
-            <a:r>
-              <a:rPr lang="en-US" altLang="ko-KR" sz="1600" spc="-50" dirty="0"/>
-              <a:t>)</a:t>
-            </a:r>
-          </a:p>
-          <a:p>
-            <a:pPr marL="377825" indent="-285750">
-              <a:lnSpc>
-                <a:spcPct val="150000"/>
-              </a:lnSpc>
-              <a:buFont typeface="Wingdings" panose="05000000000000000000" pitchFamily="2" charset="2"/>
-              <a:buChar char="ü"/>
-            </a:pPr>
-            <a:endParaRPr lang="en-US" altLang="ko-KR" sz="1600" spc="-50" dirty="0"/>
-          </a:p>
-          <a:p>
-            <a:pPr>
-              <a:lnSpc>
-                <a:spcPct val="150000"/>
-              </a:lnSpc>
-            </a:pPr>
-            <a:r>
-              <a:rPr lang="ko-KR" altLang="en-US" u="sng" dirty="0">
-                <a:ln w="3175">
-                  <a:noFill/>
-                </a:ln>
-                <a:latin typeface="HY헤드라인M" panose="02030600000101010101" pitchFamily="18" charset="-127"/>
-                <a:ea typeface="HY헤드라인M" panose="02030600000101010101" pitchFamily="18" charset="-127"/>
-              </a:rPr>
-              <a:t>성적 평가 방법</a:t>
-            </a:r>
-            <a:r>
-              <a:rPr lang="en-US" altLang="ko-KR" u="sng" dirty="0">
-                <a:ln w="3175">
-                  <a:noFill/>
-                </a:ln>
-                <a:latin typeface="HY헤드라인M" panose="02030600000101010101" pitchFamily="18" charset="-127"/>
-                <a:ea typeface="HY헤드라인M" panose="02030600000101010101" pitchFamily="18" charset="-127"/>
-              </a:rPr>
-              <a:t>:</a:t>
-            </a:r>
-            <a:r>
-              <a:rPr lang="en-US" altLang="ko-KR" dirty="0">
-                <a:ln w="3175">
-                  <a:noFill/>
-                </a:ln>
-                <a:latin typeface="HY헤드라인M" panose="02030600000101010101" pitchFamily="18" charset="-127"/>
-                <a:ea typeface="HY헤드라인M" panose="02030600000101010101" pitchFamily="18" charset="-127"/>
-              </a:rPr>
-              <a:t> </a:t>
-            </a:r>
-            <a:r>
-              <a:rPr lang="ko-KR" altLang="en-US" dirty="0">
-                <a:ln w="3175">
-                  <a:noFill/>
-                </a:ln>
-                <a:latin typeface="HY헤드라인M" panose="02030600000101010101" pitchFamily="18" charset="-127"/>
-                <a:ea typeface="HY헤드라인M" panose="02030600000101010101" pitchFamily="18" charset="-127"/>
-              </a:rPr>
-              <a:t>상대평가</a:t>
-            </a:r>
-            <a:endParaRPr lang="en-US" altLang="ko-KR" dirty="0">
-              <a:ln w="3175">
-                <a:noFill/>
-              </a:ln>
-              <a:latin typeface="HY헤드라인M" panose="02030600000101010101" pitchFamily="18" charset="-127"/>
-              <a:ea typeface="HY헤드라인M" panose="02030600000101010101" pitchFamily="18" charset="-127"/>
-            </a:endParaRPr>
-          </a:p>
-          <a:p>
-            <a:pPr>
-              <a:lnSpc>
-                <a:spcPct val="150000"/>
-              </a:lnSpc>
-            </a:pPr>
-            <a:endParaRPr lang="en-US" altLang="ko-KR" sz="400" u="sng" dirty="0">
-              <a:ln w="3175">
-                <a:noFill/>
-              </a:ln>
-              <a:latin typeface="HY헤드라인M" panose="02030600000101010101" pitchFamily="18" charset="-127"/>
-              <a:ea typeface="HY헤드라인M" panose="02030600000101010101" pitchFamily="18" charset="-127"/>
-            </a:endParaRPr>
-          </a:p>
-          <a:p>
-            <a:pPr marL="377825" indent="-285750">
-              <a:lnSpc>
-                <a:spcPct val="150000"/>
-              </a:lnSpc>
-              <a:buFont typeface="Wingdings" panose="05000000000000000000" pitchFamily="2" charset="2"/>
-              <a:buChar char="ü"/>
-            </a:pPr>
-            <a:r>
-              <a:rPr lang="ko-KR" altLang="en-US" sz="1600" spc="-50" dirty="0"/>
-              <a:t>출석</a:t>
-            </a:r>
-            <a:r>
-              <a:rPr lang="en-US" altLang="ko-KR" sz="1600" spc="-50" dirty="0"/>
-              <a:t>: 10%, </a:t>
-            </a:r>
-            <a:r>
-              <a:rPr lang="ko-KR" altLang="en-US" sz="1600" spc="-50" dirty="0"/>
-              <a:t>중간고사</a:t>
-            </a:r>
-            <a:r>
-              <a:rPr lang="en-US" altLang="ko-KR" sz="1600" spc="-50" dirty="0"/>
-              <a:t>: 45%, </a:t>
-            </a:r>
-            <a:r>
-              <a:rPr lang="ko-KR" altLang="en-US" sz="1600" spc="-50" dirty="0"/>
-              <a:t>기말고사 </a:t>
-            </a:r>
-            <a:r>
-              <a:rPr lang="en-US" altLang="ko-KR" sz="1600" spc="-50" dirty="0"/>
-              <a:t>45%</a:t>
-            </a:r>
-          </a:p>
-          <a:p>
-            <a:pPr marL="377825" indent="-285750">
-              <a:lnSpc>
-                <a:spcPct val="150000"/>
-              </a:lnSpc>
-              <a:buFont typeface="Wingdings" panose="05000000000000000000" pitchFamily="2" charset="2"/>
-              <a:buChar char="ü"/>
-            </a:pPr>
-            <a:r>
-              <a:rPr lang="ko-KR" altLang="en-US" sz="1600" spc="-50" dirty="0"/>
-              <a:t>문제풀이</a:t>
-            </a:r>
-            <a:r>
-              <a:rPr lang="en-US" altLang="ko-KR" sz="1600" spc="-50" dirty="0"/>
-              <a:t> (OX, </a:t>
-            </a:r>
-            <a:r>
-              <a:rPr lang="ko-KR" altLang="en-US" sz="1600" spc="-50" dirty="0"/>
-              <a:t>객관식</a:t>
-            </a:r>
-            <a:r>
-              <a:rPr lang="en-US" altLang="ko-KR" sz="1600" spc="-50" dirty="0"/>
-              <a:t>, </a:t>
-            </a:r>
-            <a:r>
-              <a:rPr lang="ko-KR" altLang="en-US" sz="1600" spc="-50" dirty="0"/>
-              <a:t>주관식</a:t>
-            </a:r>
-            <a:r>
-              <a:rPr lang="en-US" altLang="ko-KR" sz="1600" spc="-50" dirty="0"/>
-              <a:t>, </a:t>
-            </a:r>
-            <a:r>
-              <a:rPr lang="ko-KR" altLang="en-US" sz="1600" spc="-50" dirty="0"/>
-              <a:t>서술형 포함</a:t>
-            </a:r>
-            <a:r>
-              <a:rPr lang="en-US" altLang="ko-KR" sz="1600" spc="-50" dirty="0"/>
-              <a:t>)</a:t>
-            </a:r>
-          </a:p>
-          <a:p>
-            <a:pPr marL="92075">
-              <a:lnSpc>
-                <a:spcPct val="150000"/>
-              </a:lnSpc>
-            </a:pPr>
-            <a:r>
-              <a:rPr lang="ko-KR" altLang="en-US" sz="1600" u="sng" spc="-50" dirty="0">
-                <a:ln w="3175">
-                  <a:noFill/>
-                </a:ln>
-                <a:latin typeface="HY헤드라인M" panose="02030600000101010101" pitchFamily="18" charset="-127"/>
-                <a:ea typeface="HY헤드라인M" panose="02030600000101010101" pitchFamily="18" charset="-127"/>
-              </a:rPr>
-              <a:t>　</a:t>
-            </a:r>
-            <a:endParaRPr lang="en-US" altLang="ko-KR" sz="1600" u="sng" spc="-50" dirty="0">
-              <a:ln w="3175">
-                <a:noFill/>
-              </a:ln>
-              <a:latin typeface="HY헤드라인M" panose="02030600000101010101" pitchFamily="18" charset="-127"/>
-              <a:ea typeface="HY헤드라인M" panose="02030600000101010101" pitchFamily="18" charset="-127"/>
-            </a:endParaRPr>
-          </a:p>
-          <a:p>
-            <a:pPr>
-              <a:lnSpc>
-                <a:spcPct val="150000"/>
-              </a:lnSpc>
-            </a:pPr>
-            <a:r>
-              <a:rPr lang="ko-KR" altLang="en-US" u="sng" dirty="0">
-                <a:ln w="3175">
-                  <a:noFill/>
-                </a:ln>
-                <a:latin typeface="HY헤드라인M" panose="02030600000101010101" pitchFamily="18" charset="-127"/>
-                <a:ea typeface="HY헤드라인M" panose="02030600000101010101" pitchFamily="18" charset="-127"/>
-              </a:rPr>
-              <a:t>개별 면담</a:t>
-            </a:r>
-            <a:endParaRPr lang="en-US" altLang="ko-KR" u="sng" dirty="0">
-              <a:ln w="3175">
-                <a:noFill/>
-              </a:ln>
-              <a:latin typeface="HY헤드라인M" panose="02030600000101010101" pitchFamily="18" charset="-127"/>
-              <a:ea typeface="HY헤드라인M" panose="02030600000101010101" pitchFamily="18" charset="-127"/>
-            </a:endParaRPr>
-          </a:p>
-          <a:p>
-            <a:pPr>
-              <a:lnSpc>
-                <a:spcPct val="150000"/>
-              </a:lnSpc>
-            </a:pPr>
-            <a:endParaRPr lang="en-US" altLang="ko-KR" sz="400" u="sng" dirty="0">
-              <a:ln w="3175">
-                <a:noFill/>
-              </a:ln>
-              <a:latin typeface="HY헤드라인M" panose="02030600000101010101" pitchFamily="18" charset="-127"/>
-              <a:ea typeface="HY헤드라인M" panose="02030600000101010101" pitchFamily="18" charset="-127"/>
-            </a:endParaRPr>
-          </a:p>
-          <a:p>
-            <a:pPr marL="377825" indent="-285750">
-              <a:lnSpc>
-                <a:spcPct val="150000"/>
-              </a:lnSpc>
-              <a:buFont typeface="Wingdings" panose="05000000000000000000" pitchFamily="2" charset="2"/>
-              <a:buChar char="ü"/>
-            </a:pPr>
-            <a:r>
-              <a:rPr lang="en-US" altLang="ko-KR" sz="1600" spc="-50" dirty="0"/>
-              <a:t>703</a:t>
-            </a:r>
-            <a:r>
-              <a:rPr lang="ko-KR" altLang="en-US" sz="1600" spc="-50" dirty="0"/>
-              <a:t>호 노크해서 내가 자리에 있으면 언제든지 환영</a:t>
-            </a:r>
-            <a:endParaRPr lang="en-US" altLang="ko-KR" sz="1600" spc="-50" dirty="0"/>
-          </a:p>
-          <a:p>
-            <a:pPr marL="377825" indent="-285750">
-              <a:lnSpc>
-                <a:spcPct val="150000"/>
-              </a:lnSpc>
-              <a:buFont typeface="Wingdings" panose="05000000000000000000" pitchFamily="2" charset="2"/>
-              <a:buChar char="ü"/>
-            </a:pPr>
-            <a:r>
-              <a:rPr lang="ko-KR" altLang="en-US" sz="1600" spc="-50" dirty="0"/>
-              <a:t>미리 이메일 통해서 약속 잡는 것도 환영</a:t>
-            </a:r>
-            <a:endParaRPr lang="en-US" altLang="ko-KR" sz="1600" spc="-50" dirty="0"/>
-          </a:p>
-          <a:p>
-            <a:pPr marL="377825" indent="-285750">
-              <a:lnSpc>
-                <a:spcPct val="150000"/>
-              </a:lnSpc>
-              <a:buFont typeface="Wingdings" panose="05000000000000000000" pitchFamily="2" charset="2"/>
-              <a:buChar char="ü"/>
-            </a:pPr>
-            <a:r>
-              <a:rPr lang="ko-KR" altLang="en-US" sz="1600" spc="-50" dirty="0"/>
-              <a:t>면담내용은 어떤 내용도 환영</a:t>
-            </a:r>
-            <a:endParaRPr lang="en-US" altLang="ko-KR" sz="1600" spc="-50" dirty="0"/>
-          </a:p>
-        </p:txBody>
-      </p:sp>
-    </p:spTree>
-    <p:extLst>
-      <p:ext uri="{BB962C8B-B14F-4D97-AF65-F5344CB8AC3E}">
-        <p14:creationId xmlns:p14="http://schemas.microsoft.com/office/powerpoint/2010/main" val="781482546"/>
-      </p:ext>
-    </p:extLst>
-  </p:cSld>
-  <p:clrMapOvr>
-    <a:masterClrMapping/>
-  </p:clrMapOvr>
-</p:sld>
-</file>
-
-<file path=ppt/slides/slide20.xml><?xml version="1.0" encoding="utf-8"?>
+<file path=ppt/slides/slide19.xml><?xml version="1.0" encoding="utf-8"?>
 <p:sld xmlns:a="http://schemas.openxmlformats.org/drawingml/2006/main" xmlns:r="http://schemas.openxmlformats.org/officeDocument/2006/relationships" xmlns:p="http://schemas.openxmlformats.org/presentationml/2006/main">
   <p:cSld>
     <p:spTree>
@@ -11036,7 +10419,7 @@
           <a:p>
             <a:fld id="{109C872D-39A9-4065-8BF3-6A613116E2A1}" type="slidenum">
               <a:rPr lang="ko-KR" altLang="en-US" smtClean="0"/>
-              <a:t>20</a:t>
+              <a:t>19</a:t>
             </a:fld>
             <a:endParaRPr lang="ko-KR" altLang="en-US"/>
           </a:p>
@@ -11344,7 +10727,164 @@
 </p:sld>
 </file>
 
-<file path=ppt/slides/slide21.xml><?xml version="1.0" encoding="utf-8"?>
+<file path=ppt/slides/slide2.xml><?xml version="1.0" encoding="utf-8"?>
+<p:sld xmlns:a="http://schemas.openxmlformats.org/drawingml/2006/main" xmlns:r="http://schemas.openxmlformats.org/officeDocument/2006/relationships" xmlns:p="http://schemas.openxmlformats.org/presentationml/2006/main">
+  <p:cSld>
+    <p:spTree>
+      <p:nvGrpSpPr>
+        <p:cNvPr id="1" name="">
+          <a:extLst>
+            <a:ext uri="{FF2B5EF4-FFF2-40B4-BE49-F238E27FC236}">
+              <a16:creationId xmlns:a16="http://schemas.microsoft.com/office/drawing/2014/main" id="{C41D0659-CAFD-F53E-5E96-AE42A73FE935}"/>
+            </a:ext>
+          </a:extLst>
+        </p:cNvPr>
+        <p:cNvGrpSpPr/>
+        <p:nvPr/>
+      </p:nvGrpSpPr>
+      <p:grpSpPr>
+        <a:xfrm>
+          <a:off x="0" y="0"/>
+          <a:ext cx="0" cy="0"/>
+          <a:chOff x="0" y="0"/>
+          <a:chExt cx="0" cy="0"/>
+        </a:xfrm>
+      </p:grpSpPr>
+      <p:pic>
+        <p:nvPicPr>
+          <p:cNvPr id="6" name="그림 5" descr="텍스트, 로고, 원, 폰트이(가) 표시된 사진&#10;&#10;AI 생성 콘텐츠는 정확하지 않을 수 있습니다.">
+            <a:extLst>
+              <a:ext uri="{FF2B5EF4-FFF2-40B4-BE49-F238E27FC236}">
+                <a16:creationId xmlns:a16="http://schemas.microsoft.com/office/drawing/2014/main" id="{D5C3F3A0-36ED-43FB-2D13-6CAA30B083C2}"/>
+              </a:ext>
+            </a:extLst>
+          </p:cNvPr>
+          <p:cNvPicPr>
+            <a:picLocks noChangeAspect="1"/>
+          </p:cNvPicPr>
+          <p:nvPr/>
+        </p:nvPicPr>
+        <p:blipFill>
+          <a:blip r:embed="rId2">
+            <a:alphaModFix amt="20000"/>
+            <a:extLst>
+              <a:ext uri="{28A0092B-C50C-407E-A947-70E740481C1C}">
+                <a14:useLocalDpi xmlns:a14="http://schemas.microsoft.com/office/drawing/2010/main" val="0"/>
+              </a:ext>
+            </a:extLst>
+          </a:blip>
+          <a:stretch>
+            <a:fillRect/>
+          </a:stretch>
+        </p:blipFill>
+        <p:spPr>
+          <a:xfrm>
+            <a:off x="4012070" y="1673061"/>
+            <a:ext cx="4167861" cy="4167861"/>
+          </a:xfrm>
+          <a:prstGeom prst="rect">
+            <a:avLst/>
+          </a:prstGeom>
+        </p:spPr>
+      </p:pic>
+      <p:sp>
+        <p:nvSpPr>
+          <p:cNvPr id="4" name="슬라이드 번호 개체 틀 3">
+            <a:extLst>
+              <a:ext uri="{FF2B5EF4-FFF2-40B4-BE49-F238E27FC236}">
+                <a16:creationId xmlns:a16="http://schemas.microsoft.com/office/drawing/2014/main" id="{A8D19C74-D6C9-BA18-D11B-15A0CD9AF906}"/>
+              </a:ext>
+            </a:extLst>
+          </p:cNvPr>
+          <p:cNvSpPr>
+            <a:spLocks noGrp="1"/>
+          </p:cNvSpPr>
+          <p:nvPr>
+            <p:ph type="sldNum" sz="quarter" idx="12"/>
+          </p:nvPr>
+        </p:nvSpPr>
+        <p:spPr/>
+        <p:txBody>
+          <a:bodyPr/>
+          <a:lstStyle/>
+          <a:p>
+            <a:fld id="{109C872D-39A9-4065-8BF3-6A613116E2A1}" type="slidenum">
+              <a:rPr lang="ko-KR" altLang="en-US" smtClean="0"/>
+              <a:t>2</a:t>
+            </a:fld>
+            <a:endParaRPr lang="ko-KR" altLang="en-US"/>
+          </a:p>
+        </p:txBody>
+      </p:sp>
+      <p:sp>
+        <p:nvSpPr>
+          <p:cNvPr id="7" name="제목 1">
+            <a:extLst>
+              <a:ext uri="{FF2B5EF4-FFF2-40B4-BE49-F238E27FC236}">
+                <a16:creationId xmlns:a16="http://schemas.microsoft.com/office/drawing/2014/main" id="{B58D8A77-45B6-C35A-AFD8-829E4435C90E}"/>
+              </a:ext>
+            </a:extLst>
+          </p:cNvPr>
+          <p:cNvSpPr>
+            <a:spLocks noGrp="1"/>
+          </p:cNvSpPr>
+          <p:nvPr>
+            <p:ph type="title"/>
+          </p:nvPr>
+        </p:nvSpPr>
+        <p:spPr>
+          <a:xfrm>
+            <a:off x="831850" y="2478940"/>
+            <a:ext cx="11007224" cy="1939428"/>
+          </a:xfrm>
+          <a:effectLst>
+            <a:reflection blurRad="50800" stA="45000" endPos="44000" dir="5400000" sy="-100000" algn="bl" rotWithShape="0"/>
+          </a:effectLst>
+        </p:spPr>
+        <p:txBody>
+          <a:bodyPr anchor="b"/>
+          <a:lstStyle/>
+          <a:p>
+            <a:r>
+              <a:rPr lang="en-US" altLang="ko-KR" sz="4000" b="1" i="0" spc="150" dirty="0"/>
+              <a:t>Chapter 1</a:t>
+            </a:r>
+            <a:br>
+              <a:rPr lang="en-US" altLang="ko-KR" sz="4000" b="1" i="0" spc="150" dirty="0"/>
+            </a:br>
+            <a:br>
+              <a:rPr lang="en-US" altLang="ko-KR" sz="4000" b="1" i="0" spc="150" dirty="0"/>
+            </a:br>
+            <a:r>
+              <a:rPr lang="ko-KR" altLang="en-US" sz="4000" b="1" i="0" spc="150" dirty="0"/>
+              <a:t>재정학</a:t>
+            </a:r>
+            <a:r>
+              <a:rPr lang="en-US" altLang="ko-KR" sz="4000" b="1" i="0" spc="150" dirty="0"/>
+              <a:t>: </a:t>
+            </a:r>
+            <a:r>
+              <a:rPr lang="ko-KR" altLang="en-US" sz="4000" b="1" i="0" spc="150" dirty="0"/>
+              <a:t>의의와 성격</a:t>
+            </a:r>
+            <a:endParaRPr lang="ko-KR" altLang="en-US" sz="3600" i="0" spc="150" dirty="0"/>
+          </a:p>
+        </p:txBody>
+      </p:sp>
+    </p:spTree>
+    <p:extLst>
+      <p:ext uri="{BB962C8B-B14F-4D97-AF65-F5344CB8AC3E}">
+        <p14:creationId xmlns:p14="http://schemas.microsoft.com/office/powerpoint/2010/main" val="2655123632"/>
+      </p:ext>
+    </p:extLst>
+  </p:cSld>
+  <p:clrMapOvr>
+    <a:masterClrMapping/>
+  </p:clrMapOvr>
+</p:sld>
+</file>
+
+<file path=ppt/slides/slide20.xml><?xml version="1.0" encoding="utf-8"?>
 <p:sld xmlns:a="http://schemas.openxmlformats.org/drawingml/2006/main" xmlns:r="http://schemas.openxmlformats.org/officeDocument/2006/relationships" xmlns:p="http://schemas.openxmlformats.org/presentationml/2006/main">
   <p:cSld>
     <p:spTree>
@@ -11423,7 +10963,7 @@
           <a:p>
             <a:fld id="{109C872D-39A9-4065-8BF3-6A613116E2A1}" type="slidenum">
               <a:rPr lang="ko-KR" altLang="en-US" smtClean="0"/>
-              <a:t>21</a:t>
+              <a:t>20</a:t>
             </a:fld>
             <a:endParaRPr lang="ko-KR" altLang="en-US"/>
           </a:p>
@@ -11805,7 +11345,7 @@
 </p:sld>
 </file>
 
-<file path=ppt/slides/slide22.xml><?xml version="1.0" encoding="utf-8"?>
+<file path=ppt/slides/slide21.xml><?xml version="1.0" encoding="utf-8"?>
 <p:sld xmlns:a="http://schemas.openxmlformats.org/drawingml/2006/main" xmlns:r="http://schemas.openxmlformats.org/officeDocument/2006/relationships" xmlns:p="http://schemas.openxmlformats.org/presentationml/2006/main">
   <p:cSld>
     <p:spTree>
@@ -11884,7 +11424,7 @@
           <a:p>
             <a:fld id="{109C872D-39A9-4065-8BF3-6A613116E2A1}" type="slidenum">
               <a:rPr lang="ko-KR" altLang="en-US" smtClean="0"/>
-              <a:t>22</a:t>
+              <a:t>21</a:t>
             </a:fld>
             <a:endParaRPr lang="ko-KR" altLang="en-US"/>
           </a:p>
@@ -12010,7 +11550,15 @@
             </a:r>
             <a:r>
               <a:rPr lang="ko-KR" altLang="en-US" sz="1600" spc="-50" dirty="0"/>
-              <a:t>년대에 들어와 케인즈혁명의 열기가 가라앉으면서 전통적인 미시적 자원분배의 문제 대한 연구가 주된 관심이 되었다</a:t>
+              <a:t>년대에 들어와 케인즈혁명의 열기가 가라앉으면서 전통적인 미시적 </a:t>
+            </a:r>
+            <a:r>
+              <a:rPr lang="ko-KR" altLang="en-US" sz="1600" spc="-50"/>
+              <a:t>자원분배의 문제에 </a:t>
+            </a:r>
+            <a:r>
+              <a:rPr lang="ko-KR" altLang="en-US" sz="1600" spc="-50" dirty="0"/>
+              <a:t>대한 연구가 주된 관심이 되었다</a:t>
             </a:r>
             <a:r>
               <a:rPr lang="en-US" altLang="ko-KR" sz="1600" spc="-50" dirty="0"/>
@@ -12229,7 +11777,7 @@
 </p:sld>
 </file>
 
-<file path=ppt/slides/slide23.xml><?xml version="1.0" encoding="utf-8"?>
+<file path=ppt/slides/slide22.xml><?xml version="1.0" encoding="utf-8"?>
 <p:sld xmlns:a="http://schemas.openxmlformats.org/drawingml/2006/main" xmlns:r="http://schemas.openxmlformats.org/officeDocument/2006/relationships" xmlns:p="http://schemas.openxmlformats.org/presentationml/2006/main">
   <p:cSld>
     <p:spTree>
@@ -12357,7 +11905,7 @@
           <a:p>
             <a:fld id="{109C872D-39A9-4065-8BF3-6A613116E2A1}" type="slidenum">
               <a:rPr lang="ko-KR" altLang="en-US" smtClean="0"/>
-              <a:t>23</a:t>
+              <a:t>22</a:t>
             </a:fld>
             <a:endParaRPr lang="ko-KR" altLang="en-US"/>
           </a:p>
@@ -12381,163 +11929,6 @@
   <p:cSld>
     <p:spTree>
       <p:nvGrpSpPr>
-        <p:cNvPr id="1" name="">
-          <a:extLst>
-            <a:ext uri="{FF2B5EF4-FFF2-40B4-BE49-F238E27FC236}">
-              <a16:creationId xmlns:a16="http://schemas.microsoft.com/office/drawing/2014/main" id="{C41D0659-CAFD-F53E-5E96-AE42A73FE935}"/>
-            </a:ext>
-          </a:extLst>
-        </p:cNvPr>
-        <p:cNvGrpSpPr/>
-        <p:nvPr/>
-      </p:nvGrpSpPr>
-      <p:grpSpPr>
-        <a:xfrm>
-          <a:off x="0" y="0"/>
-          <a:ext cx="0" cy="0"/>
-          <a:chOff x="0" y="0"/>
-          <a:chExt cx="0" cy="0"/>
-        </a:xfrm>
-      </p:grpSpPr>
-      <p:pic>
-        <p:nvPicPr>
-          <p:cNvPr id="6" name="그림 5" descr="텍스트, 로고, 원, 폰트이(가) 표시된 사진&#10;&#10;AI 생성 콘텐츠는 정확하지 않을 수 있습니다.">
-            <a:extLst>
-              <a:ext uri="{FF2B5EF4-FFF2-40B4-BE49-F238E27FC236}">
-                <a16:creationId xmlns:a16="http://schemas.microsoft.com/office/drawing/2014/main" id="{D5C3F3A0-36ED-43FB-2D13-6CAA30B083C2}"/>
-              </a:ext>
-            </a:extLst>
-          </p:cNvPr>
-          <p:cNvPicPr>
-            <a:picLocks noChangeAspect="1"/>
-          </p:cNvPicPr>
-          <p:nvPr/>
-        </p:nvPicPr>
-        <p:blipFill>
-          <a:blip r:embed="rId2">
-            <a:alphaModFix amt="20000"/>
-            <a:extLst>
-              <a:ext uri="{28A0092B-C50C-407E-A947-70E740481C1C}">
-                <a14:useLocalDpi xmlns:a14="http://schemas.microsoft.com/office/drawing/2010/main" val="0"/>
-              </a:ext>
-            </a:extLst>
-          </a:blip>
-          <a:stretch>
-            <a:fillRect/>
-          </a:stretch>
-        </p:blipFill>
-        <p:spPr>
-          <a:xfrm>
-            <a:off x="4012070" y="1673061"/>
-            <a:ext cx="4167861" cy="4167861"/>
-          </a:xfrm>
-          <a:prstGeom prst="rect">
-            <a:avLst/>
-          </a:prstGeom>
-        </p:spPr>
-      </p:pic>
-      <p:sp>
-        <p:nvSpPr>
-          <p:cNvPr id="4" name="슬라이드 번호 개체 틀 3">
-            <a:extLst>
-              <a:ext uri="{FF2B5EF4-FFF2-40B4-BE49-F238E27FC236}">
-                <a16:creationId xmlns:a16="http://schemas.microsoft.com/office/drawing/2014/main" id="{A8D19C74-D6C9-BA18-D11B-15A0CD9AF906}"/>
-              </a:ext>
-            </a:extLst>
-          </p:cNvPr>
-          <p:cNvSpPr>
-            <a:spLocks noGrp="1"/>
-          </p:cNvSpPr>
-          <p:nvPr>
-            <p:ph type="sldNum" sz="quarter" idx="12"/>
-          </p:nvPr>
-        </p:nvSpPr>
-        <p:spPr/>
-        <p:txBody>
-          <a:bodyPr/>
-          <a:lstStyle/>
-          <a:p>
-            <a:fld id="{109C872D-39A9-4065-8BF3-6A613116E2A1}" type="slidenum">
-              <a:rPr lang="ko-KR" altLang="en-US" smtClean="0"/>
-              <a:t>3</a:t>
-            </a:fld>
-            <a:endParaRPr lang="ko-KR" altLang="en-US"/>
-          </a:p>
-        </p:txBody>
-      </p:sp>
-      <p:sp>
-        <p:nvSpPr>
-          <p:cNvPr id="7" name="제목 1">
-            <a:extLst>
-              <a:ext uri="{FF2B5EF4-FFF2-40B4-BE49-F238E27FC236}">
-                <a16:creationId xmlns:a16="http://schemas.microsoft.com/office/drawing/2014/main" id="{B58D8A77-45B6-C35A-AFD8-829E4435C90E}"/>
-              </a:ext>
-            </a:extLst>
-          </p:cNvPr>
-          <p:cNvSpPr>
-            <a:spLocks noGrp="1"/>
-          </p:cNvSpPr>
-          <p:nvPr>
-            <p:ph type="title"/>
-          </p:nvPr>
-        </p:nvSpPr>
-        <p:spPr>
-          <a:xfrm>
-            <a:off x="831850" y="2478940"/>
-            <a:ext cx="11007224" cy="1939428"/>
-          </a:xfrm>
-          <a:effectLst>
-            <a:reflection blurRad="50800" stA="45000" endPos="44000" dir="5400000" sy="-100000" algn="bl" rotWithShape="0"/>
-          </a:effectLst>
-        </p:spPr>
-        <p:txBody>
-          <a:bodyPr anchor="b"/>
-          <a:lstStyle/>
-          <a:p>
-            <a:r>
-              <a:rPr lang="en-US" altLang="ko-KR" sz="4000" b="1" i="0" spc="150" dirty="0"/>
-              <a:t>Chapter 1</a:t>
-            </a:r>
-            <a:br>
-              <a:rPr lang="en-US" altLang="ko-KR" sz="4000" b="1" i="0" spc="150" dirty="0"/>
-            </a:br>
-            <a:br>
-              <a:rPr lang="en-US" altLang="ko-KR" sz="4000" b="1" i="0" spc="150" dirty="0"/>
-            </a:br>
-            <a:r>
-              <a:rPr lang="ko-KR" altLang="en-US" sz="4000" b="1" i="0" spc="150" dirty="0"/>
-              <a:t>재정학</a:t>
-            </a:r>
-            <a:r>
-              <a:rPr lang="en-US" altLang="ko-KR" sz="4000" b="1" i="0" spc="150" dirty="0"/>
-              <a:t>: </a:t>
-            </a:r>
-            <a:r>
-              <a:rPr lang="ko-KR" altLang="en-US" sz="4000" b="1" i="0" spc="150" dirty="0"/>
-              <a:t>의의와 성격</a:t>
-            </a:r>
-            <a:endParaRPr lang="ko-KR" altLang="en-US" sz="3600" i="0" spc="150" dirty="0"/>
-          </a:p>
-        </p:txBody>
-      </p:sp>
-    </p:spTree>
-    <p:extLst>
-      <p:ext uri="{BB962C8B-B14F-4D97-AF65-F5344CB8AC3E}">
-        <p14:creationId xmlns:p14="http://schemas.microsoft.com/office/powerpoint/2010/main" val="2655123632"/>
-      </p:ext>
-    </p:extLst>
-  </p:cSld>
-  <p:clrMapOvr>
-    <a:masterClrMapping/>
-  </p:clrMapOvr>
-</p:sld>
-</file>
-
-<file path=ppt/slides/slide4.xml><?xml version="1.0" encoding="utf-8"?>
-<p:sld xmlns:a="http://schemas.openxmlformats.org/drawingml/2006/main" xmlns:r="http://schemas.openxmlformats.org/officeDocument/2006/relationships" xmlns:p="http://schemas.openxmlformats.org/presentationml/2006/main">
-  <p:cSld>
-    <p:spTree>
-      <p:nvGrpSpPr>
         <p:cNvPr id="1" name=""/>
         <p:cNvGrpSpPr/>
         <p:nvPr/>
@@ -12609,7 +12000,7 @@
           <a:p>
             <a:fld id="{109C872D-39A9-4065-8BF3-6A613116E2A1}" type="slidenum">
               <a:rPr lang="ko-KR" altLang="en-US" smtClean="0"/>
-              <a:t>4</a:t>
+              <a:t>3</a:t>
             </a:fld>
             <a:endParaRPr lang="ko-KR" altLang="en-US"/>
           </a:p>
@@ -13010,7 +12401,7 @@
 </p:sld>
 </file>
 
-<file path=ppt/slides/slide5.xml><?xml version="1.0" encoding="utf-8"?>
+<file path=ppt/slides/slide4.xml><?xml version="1.0" encoding="utf-8"?>
 <p:sld xmlns:a="http://schemas.openxmlformats.org/drawingml/2006/main" xmlns:r="http://schemas.openxmlformats.org/officeDocument/2006/relationships" xmlns:p="http://schemas.openxmlformats.org/presentationml/2006/main">
   <p:cSld>
     <p:spTree>
@@ -13093,7 +12484,7 @@
           <a:p>
             <a:fld id="{109C872D-39A9-4065-8BF3-6A613116E2A1}" type="slidenum">
               <a:rPr lang="ko-KR" altLang="en-US" smtClean="0"/>
-              <a:t>5</a:t>
+              <a:t>4</a:t>
             </a:fld>
             <a:endParaRPr lang="ko-KR" altLang="en-US"/>
           </a:p>
@@ -13153,7 +12544,7 @@
 </p:sld>
 </file>
 
-<file path=ppt/slides/slide6.xml><?xml version="1.0" encoding="utf-8"?>
+<file path=ppt/slides/slide5.xml><?xml version="1.0" encoding="utf-8"?>
 <p:sld xmlns:a="http://schemas.openxmlformats.org/drawingml/2006/main" xmlns:r="http://schemas.openxmlformats.org/officeDocument/2006/relationships" xmlns:p="http://schemas.openxmlformats.org/presentationml/2006/main">
   <p:cSld>
     <p:spTree>
@@ -13221,7 +12612,7 @@
           <a:p>
             <a:fld id="{109C872D-39A9-4065-8BF3-6A613116E2A1}" type="slidenum">
               <a:rPr lang="ko-KR" altLang="en-US" smtClean="0"/>
-              <a:t>6</a:t>
+              <a:t>5</a:t>
             </a:fld>
             <a:endParaRPr lang="ko-KR" altLang="en-US"/>
           </a:p>
@@ -13495,7 +12886,7 @@
 </p:sld>
 </file>
 
-<file path=ppt/slides/slide7.xml><?xml version="1.0" encoding="utf-8"?>
+<file path=ppt/slides/slide6.xml><?xml version="1.0" encoding="utf-8"?>
 <p:sld xmlns:a="http://schemas.openxmlformats.org/drawingml/2006/main" xmlns:r="http://schemas.openxmlformats.org/officeDocument/2006/relationships" xmlns:p="http://schemas.openxmlformats.org/presentationml/2006/main">
   <p:cSld>
     <p:spTree>
@@ -13578,7 +12969,7 @@
           <a:p>
             <a:fld id="{109C872D-39A9-4065-8BF3-6A613116E2A1}" type="slidenum">
               <a:rPr lang="ko-KR" altLang="en-US" smtClean="0"/>
-              <a:t>7</a:t>
+              <a:t>6</a:t>
             </a:fld>
             <a:endParaRPr lang="ko-KR" altLang="en-US"/>
           </a:p>
@@ -13646,7 +13037,7 @@
 </p:sld>
 </file>
 
-<file path=ppt/slides/slide8.xml><?xml version="1.0" encoding="utf-8"?>
+<file path=ppt/slides/slide7.xml><?xml version="1.0" encoding="utf-8"?>
 <p:sld xmlns:a="http://schemas.openxmlformats.org/drawingml/2006/main" xmlns:r="http://schemas.openxmlformats.org/officeDocument/2006/relationships" xmlns:p="http://schemas.openxmlformats.org/presentationml/2006/main">
   <p:cSld>
     <p:spTree>
@@ -13720,7 +13111,7 @@
           <a:p>
             <a:fld id="{109C872D-39A9-4065-8BF3-6A613116E2A1}" type="slidenum">
               <a:rPr lang="ko-KR" altLang="en-US" smtClean="0"/>
-              <a:t>8</a:t>
+              <a:t>7</a:t>
             </a:fld>
             <a:endParaRPr lang="ko-KR" altLang="en-US"/>
           </a:p>
@@ -14157,7 +13548,7 @@
 </p:sld>
 </file>
 
-<file path=ppt/slides/slide9.xml><?xml version="1.0" encoding="utf-8"?>
+<file path=ppt/slides/slide8.xml><?xml version="1.0" encoding="utf-8"?>
 <p:sld xmlns:a="http://schemas.openxmlformats.org/drawingml/2006/main" xmlns:r="http://schemas.openxmlformats.org/officeDocument/2006/relationships" xmlns:p="http://schemas.openxmlformats.org/presentationml/2006/main">
   <p:cSld>
     <p:spTree>
@@ -14231,7 +13622,7 @@
           <a:p>
             <a:fld id="{109C872D-39A9-4065-8BF3-6A613116E2A1}" type="slidenum">
               <a:rPr lang="ko-KR" altLang="en-US" smtClean="0"/>
-              <a:t>9</a:t>
+              <a:t>8</a:t>
             </a:fld>
             <a:endParaRPr lang="ko-KR" altLang="en-US"/>
           </a:p>
@@ -14555,6 +13946,149 @@
     <p:extLst>
       <p:ext uri="{BB962C8B-B14F-4D97-AF65-F5344CB8AC3E}">
         <p14:creationId xmlns:p14="http://schemas.microsoft.com/office/powerpoint/2010/main" val="1680827835"/>
+      </p:ext>
+    </p:extLst>
+  </p:cSld>
+  <p:clrMapOvr>
+    <a:masterClrMapping/>
+  </p:clrMapOvr>
+</p:sld>
+</file>
+
+<file path=ppt/slides/slide9.xml><?xml version="1.0" encoding="utf-8"?>
+<p:sld xmlns:a="http://schemas.openxmlformats.org/drawingml/2006/main" xmlns:r="http://schemas.openxmlformats.org/officeDocument/2006/relationships" xmlns:p="http://schemas.openxmlformats.org/presentationml/2006/main">
+  <p:cSld>
+    <p:spTree>
+      <p:nvGrpSpPr>
+        <p:cNvPr id="1" name="">
+          <a:extLst>
+            <a:ext uri="{FF2B5EF4-FFF2-40B4-BE49-F238E27FC236}">
+              <a16:creationId xmlns:a16="http://schemas.microsoft.com/office/drawing/2014/main" id="{29209412-C19A-4290-3307-F76585F2784C}"/>
+            </a:ext>
+          </a:extLst>
+        </p:cNvPr>
+        <p:cNvGrpSpPr/>
+        <p:nvPr/>
+      </p:nvGrpSpPr>
+      <p:grpSpPr>
+        <a:xfrm>
+          <a:off x="0" y="0"/>
+          <a:ext cx="0" cy="0"/>
+          <a:chOff x="0" y="0"/>
+          <a:chExt cx="0" cy="0"/>
+        </a:xfrm>
+      </p:grpSpPr>
+      <p:pic>
+        <p:nvPicPr>
+          <p:cNvPr id="6" name="그림 5" descr="텍스트, 로고, 원, 폰트이(가) 표시된 사진&#10;&#10;AI 생성 콘텐츠는 정확하지 않을 수 있습니다.">
+            <a:extLst>
+              <a:ext uri="{FF2B5EF4-FFF2-40B4-BE49-F238E27FC236}">
+                <a16:creationId xmlns:a16="http://schemas.microsoft.com/office/drawing/2014/main" id="{D488FA50-5A64-CB2C-A9CC-AC1B6182F7B6}"/>
+              </a:ext>
+            </a:extLst>
+          </p:cNvPr>
+          <p:cNvPicPr>
+            <a:picLocks noChangeAspect="1"/>
+          </p:cNvPicPr>
+          <p:nvPr/>
+        </p:nvPicPr>
+        <p:blipFill>
+          <a:blip r:embed="rId2">
+            <a:alphaModFix amt="20000"/>
+            <a:extLst>
+              <a:ext uri="{28A0092B-C50C-407E-A947-70E740481C1C}">
+                <a14:useLocalDpi xmlns:a14="http://schemas.microsoft.com/office/drawing/2010/main" val="0"/>
+              </a:ext>
+            </a:extLst>
+          </a:blip>
+          <a:stretch>
+            <a:fillRect/>
+          </a:stretch>
+        </p:blipFill>
+        <p:spPr>
+          <a:xfrm>
+            <a:off x="4012070" y="1673061"/>
+            <a:ext cx="4167861" cy="4167861"/>
+          </a:xfrm>
+          <a:prstGeom prst="rect">
+            <a:avLst/>
+          </a:prstGeom>
+        </p:spPr>
+      </p:pic>
+      <p:sp>
+        <p:nvSpPr>
+          <p:cNvPr id="4" name="슬라이드 번호 개체 틀 3">
+            <a:extLst>
+              <a:ext uri="{FF2B5EF4-FFF2-40B4-BE49-F238E27FC236}">
+                <a16:creationId xmlns:a16="http://schemas.microsoft.com/office/drawing/2014/main" id="{4EFBBE6E-76A7-CC95-FDC2-5AFB7A5D4434}"/>
+              </a:ext>
+            </a:extLst>
+          </p:cNvPr>
+          <p:cNvSpPr>
+            <a:spLocks noGrp="1"/>
+          </p:cNvSpPr>
+          <p:nvPr>
+            <p:ph type="sldNum" sz="quarter" idx="12"/>
+          </p:nvPr>
+        </p:nvSpPr>
+        <p:spPr/>
+        <p:txBody>
+          <a:bodyPr/>
+          <a:lstStyle/>
+          <a:p>
+            <a:fld id="{109C872D-39A9-4065-8BF3-6A613116E2A1}" type="slidenum">
+              <a:rPr lang="ko-KR" altLang="en-US" smtClean="0"/>
+              <a:t>9</a:t>
+            </a:fld>
+            <a:endParaRPr lang="ko-KR" altLang="en-US"/>
+          </a:p>
+        </p:txBody>
+      </p:sp>
+      <p:sp>
+        <p:nvSpPr>
+          <p:cNvPr id="7" name="제목 1">
+            <a:extLst>
+              <a:ext uri="{FF2B5EF4-FFF2-40B4-BE49-F238E27FC236}">
+                <a16:creationId xmlns:a16="http://schemas.microsoft.com/office/drawing/2014/main" id="{48298C76-ECF9-2277-6763-6ECCF0FAAA53}"/>
+              </a:ext>
+            </a:extLst>
+          </p:cNvPr>
+          <p:cNvSpPr>
+            <a:spLocks noGrp="1"/>
+          </p:cNvSpPr>
+          <p:nvPr>
+            <p:ph type="title"/>
+          </p:nvPr>
+        </p:nvSpPr>
+        <p:spPr>
+          <a:xfrm>
+            <a:off x="831850" y="3765550"/>
+            <a:ext cx="11150600" cy="652818"/>
+          </a:xfrm>
+          <a:effectLst>
+            <a:reflection blurRad="50800" stA="45000" endPos="44000" dir="5400000" sy="-100000" algn="bl" rotWithShape="0"/>
+          </a:effectLst>
+        </p:spPr>
+        <p:txBody>
+          <a:bodyPr anchor="b"/>
+          <a:lstStyle/>
+          <a:p>
+            <a:r>
+              <a:rPr lang="en-US" altLang="ko-KR" sz="4000" b="1" i="0" spc="150" dirty="0"/>
+              <a:t>Section 3. </a:t>
+            </a:r>
+            <a:r>
+              <a:rPr lang="ko-KR" altLang="en-US" sz="4000" b="1" i="0" spc="150" dirty="0"/>
+              <a:t>혼합경제와 정부의 역할</a:t>
+            </a:r>
+            <a:endParaRPr lang="ko-KR" altLang="en-US" sz="3600" i="0" spc="150" dirty="0"/>
+          </a:p>
+        </p:txBody>
+      </p:sp>
+    </p:spTree>
+    <p:extLst>
+      <p:ext uri="{BB962C8B-B14F-4D97-AF65-F5344CB8AC3E}">
+        <p14:creationId xmlns:p14="http://schemas.microsoft.com/office/powerpoint/2010/main" val="3680565374"/>
       </p:ext>
     </p:extLst>
   </p:cSld>

--- a/재정학/01_Lectures/재정학_Chapter_1.pptx
+++ b/재정학/01_Lectures/재정학_Chapter_1.pptx
@@ -229,7 +229,7 @@
           <a:p>
             <a:fld id="{4A5E00EF-AEA4-43E2-9451-8F9C59A39471}" type="datetimeFigureOut">
               <a:rPr lang="ko-KR" altLang="en-US" smtClean="0"/>
-              <a:t>2026-03-12</a:t>
+              <a:t>2026-03-16</a:t>
             </a:fld>
             <a:endParaRPr lang="ko-KR" altLang="en-US"/>
           </a:p>
@@ -651,7 +651,7 @@
           <a:p>
             <a:fld id="{CD32C56F-BD27-4999-9E6D-D4EACE3DA9F4}" type="datetime1">
               <a:rPr lang="ko-KR" altLang="en-US" smtClean="0"/>
-              <a:t>2026-03-12</a:t>
+              <a:t>2026-03-16</a:t>
             </a:fld>
             <a:endParaRPr lang="ko-KR" altLang="en-US"/>
           </a:p>
@@ -865,7 +865,7 @@
           <a:p>
             <a:fld id="{8EF4A19C-72C8-45CA-8E3F-68A7FA345D6C}" type="datetime1">
               <a:rPr lang="ko-KR" altLang="en-US" smtClean="0"/>
-              <a:t>2026-03-12</a:t>
+              <a:t>2026-03-16</a:t>
             </a:fld>
             <a:endParaRPr lang="ko-KR" altLang="en-US"/>
           </a:p>
@@ -1089,7 +1089,7 @@
           <a:p>
             <a:fld id="{56A175B2-010B-4341-954C-5F8F5C70B124}" type="datetime1">
               <a:rPr lang="ko-KR" altLang="en-US" smtClean="0"/>
-              <a:t>2026-03-12</a:t>
+              <a:t>2026-03-16</a:t>
             </a:fld>
             <a:endParaRPr lang="ko-KR" altLang="en-US"/>
           </a:p>
@@ -1303,7 +1303,7 @@
           <a:p>
             <a:fld id="{16B83F9E-22C9-45CA-9E85-070F1D3EF530}" type="datetime1">
               <a:rPr lang="ko-KR" altLang="en-US" smtClean="0"/>
-              <a:t>2026-03-12</a:t>
+              <a:t>2026-03-16</a:t>
             </a:fld>
             <a:endParaRPr lang="ko-KR" altLang="en-US"/>
           </a:p>
@@ -1594,7 +1594,7 @@
           <a:p>
             <a:fld id="{03278F45-FB3C-4C4D-B89A-7BC3F5F229F6}" type="datetime1">
               <a:rPr lang="ko-KR" altLang="en-US" smtClean="0"/>
-              <a:t>2026-03-12</a:t>
+              <a:t>2026-03-16</a:t>
             </a:fld>
             <a:endParaRPr lang="ko-KR" altLang="en-US"/>
           </a:p>
@@ -1987,7 +1987,7 @@
           <a:p>
             <a:fld id="{38FDAC3C-35A6-415C-9F03-738A6AC328B1}" type="datetime1">
               <a:rPr lang="ko-KR" altLang="en-US" smtClean="0"/>
-              <a:t>2026-03-12</a:t>
+              <a:t>2026-03-16</a:t>
             </a:fld>
             <a:endParaRPr lang="ko-KR" altLang="en-US"/>
           </a:p>
@@ -3581,7 +3581,7 @@
           <a:p>
             <a:fld id="{507A0DF1-AEE6-4B0D-89D2-351E7B3EF65C}" type="datetime1">
               <a:rPr lang="ko-KR" altLang="en-US" smtClean="0"/>
-              <a:t>2026-03-12</a:t>
+              <a:t>2026-03-16</a:t>
             </a:fld>
             <a:endParaRPr lang="ko-KR" altLang="en-US"/>
           </a:p>
@@ -4009,7 +4009,7 @@
           <a:p>
             <a:fld id="{CA93B8C9-630F-4D57-944D-04FD37CECCD3}" type="datetime1">
               <a:rPr lang="ko-KR" altLang="en-US" smtClean="0"/>
-              <a:t>2026-03-12</a:t>
+              <a:t>2026-03-16</a:t>
             </a:fld>
             <a:endParaRPr lang="ko-KR" altLang="en-US"/>
           </a:p>
@@ -4166,7 +4166,7 @@
           <a:p>
             <a:fld id="{E986165A-AC43-4902-9541-874ECD310BA3}" type="datetime1">
               <a:rPr lang="ko-KR" altLang="en-US" smtClean="0"/>
-              <a:t>2026-03-12</a:t>
+              <a:t>2026-03-16</a:t>
             </a:fld>
             <a:endParaRPr lang="ko-KR" altLang="en-US"/>
           </a:p>
@@ -4493,7 +4493,7 @@
           <a:p>
             <a:fld id="{47E6EE6D-2B0E-43A9-87A2-7354CDB998F4}" type="datetime1">
               <a:rPr lang="ko-KR" altLang="en-US" smtClean="0"/>
-              <a:t>2026-03-12</a:t>
+              <a:t>2026-03-16</a:t>
             </a:fld>
             <a:endParaRPr lang="ko-KR" altLang="en-US"/>
           </a:p>
@@ -4797,7 +4797,7 @@
           <a:p>
             <a:fld id="{5CC5944E-0BC8-4FAA-9F94-6B4B05834E10}" type="datetime1">
               <a:rPr lang="ko-KR" altLang="en-US" smtClean="0"/>
-              <a:t>2026-03-12</a:t>
+              <a:t>2026-03-16</a:t>
             </a:fld>
             <a:endParaRPr lang="ko-KR" altLang="en-US"/>
           </a:p>
@@ -12379,7 +12379,7 @@
             </a:pPr>
             <a:r>
               <a:rPr lang="ko-KR" altLang="en-US" sz="1600" spc="-50" dirty="0"/>
-              <a:t>우리 수업에서는 실증경제학의 범위 내에서 환경경제학을 배울 예정</a:t>
+              <a:t>우리 수업에서는 기본적으로 실증경제학의 입장을 취한다</a:t>
             </a:r>
             <a:r>
               <a:rPr lang="en-US" altLang="ko-KR" sz="1600" spc="-50" dirty="0"/>
